--- a/slides/pptx/week10.pptx
+++ b/slides/pptx/week10.pptx
@@ -19,9 +19,10 @@
     <p:sldId id="267" r:id="rId13"/>
     <p:sldId id="268" r:id="rId14"/>
     <p:sldId id="269" r:id="rId15"/>
+    <p:sldId id="270" r:id="rId16"/>
   </p:sldIdLst>
   <p:notesMasterIdLst>
-    <p:notesMasterId r:id="rId16"/>
+    <p:notesMasterId r:id="rId17"/>
   </p:notesMasterIdLst>
   <p:sldSz cx="9144000" cy="5143500"/>
   <p:notesSz cx="5143500" cy="9144000"/>
@@ -691,7 +692,7 @@
           <a:p>
             <a:r>
               <a:rPr lang="en-US" dirty="0"/>
-              <a:t>Explain before lab. crAPI is OWASP's intentionally vulnerable API. Round 2 (fix) is graded. Note crAPI is heavier (compose stack) — start the pull early. Q6 of the quiz asks for the mass-assignment field + fix + flag. ~3 min.</a:t>
+              <a:t>Explain before lab: the local app IS the graded lab — 65 of 100 points, all four tasks above. crAPI is a genuinely fun bonus with zero grading weight and no fix/patch step — don't imply "Round 2" fixes crAPI, nothing does. Defend (task 4) is read-and-cite against a pre-written solution, not student-authored code. Q6 of the quiz asks for the mass-assignment field + fix + personal flag from the LOCAL target. ~3 min.</a:t>
             </a:r>
             <a:endParaRPr lang="en-US" dirty="0"/>
           </a:p>
@@ -779,7 +780,7 @@
           <a:p>
             <a:r>
               <a:rPr lang="en-US" dirty="0"/>
-              <a:t>Before/after + API-Top-10 mapping. AI-resilient tasks count. Also the NoteVault project API task.</a:t>
+              <a:t>Explain before lab: the local app IS the graded lab — 65 of 100 points, all four tasks above. crAPI is a genuinely fun bonus with zero grading weight and no fix/patch step — don't imply "Round 2" fixes crAPI, nothing does. Defend (task 4) is read-and-cite against a pre-written solution, not student-authored code. Q6 of the quiz asks for the mass-assignment field + fix + personal flag from the LOCAL target. ~3 min.</a:t>
             </a:r>
             <a:endParaRPr lang="en-US" dirty="0"/>
           </a:p>
@@ -867,7 +868,7 @@
           <a:p>
             <a:r>
               <a:rPr lang="en-US" dirty="0"/>
-              <a:t>Recap. Cold-call: "what one check stops BOLA?" (per-object ownership authorization). ~2 min.</a:t>
+              <a:t>Before/after + API-Top-10 mapping. AI-resilient tasks count. Also the NoteVault project API task. Both flags come from the local target — remind students crAPI capture isn't part of the deliverable.</a:t>
             </a:r>
             <a:endParaRPr lang="en-US" dirty="0"/>
           </a:p>
@@ -955,7 +956,7 @@
           <a:p>
             <a:r>
               <a:rPr lang="en-US" dirty="0"/>
-              <a:t>Cliffhanger: "Next week we leave the web — crash a C binary with a fuzzer and hijack its execution, then rewrite it in Rust." Remind crAPI pulled before next session.</a:t>
+              <a:t>Recap. Cold-call: "what one check stops BOLA?" (per-object ownership authorization). ~2 min.</a:t>
             </a:r>
             <a:endParaRPr lang="en-US" dirty="0"/>
           </a:p>
@@ -979,6 +980,94 @@
             <a:fld id="{F7021451-1387-4CA6-816F-3879F97B5CBC}" type="slidenum">
               <a:rPr lang="en-US"/>
               <a:t>14</a:t>
+            </a:fld>
+            <a:endParaRPr lang="en-US"/>
+          </a:p>
+        </p:txBody>
+      </p:sp>
+    </p:spTree>
+    <p:extLst>
+      <p:ext uri="{BB962C8B-B14F-4D97-AF65-F5344CB8AC3E}">
+        <p14:creationId xmlns:p14="http://schemas.microsoft.com/office/powerpoint/2010/main" val="1024086991"/>
+      </p:ext>
+    </p:extLst>
+  </p:cSld>
+  <p:clrMapOvr>
+    <a:masterClrMapping/>
+  </p:clrMapOvr>
+</p:notes>
+</file>
+
+<file path=ppt/notesSlides/notesSlide15.xml><?xml version="1.0" encoding="utf-8"?>
+<p:notes xmlns:a="http://schemas.openxmlformats.org/drawingml/2006/main" xmlns:r="http://schemas.openxmlformats.org/officeDocument/2006/relationships" xmlns:p="http://schemas.openxmlformats.org/presentationml/2006/main">
+  <p:cSld>
+    <p:spTree>
+      <p:nvGrpSpPr>
+        <p:cNvPr id="1" name=""/>
+        <p:cNvGrpSpPr/>
+        <p:nvPr/>
+      </p:nvGrpSpPr>
+      <p:grpSpPr>
+        <a:xfrm>
+          <a:off x="0" y="0"/>
+          <a:ext cx="0" cy="0"/>
+          <a:chOff x="0" y="0"/>
+          <a:chExt cx="0" cy="0"/>
+        </a:xfrm>
+      </p:grpSpPr>
+      <p:sp>
+        <p:nvSpPr>
+          <p:cNvPr id="2" name="Slide Image Placeholder 1"/>
+          <p:cNvSpPr>
+            <a:spLocks noGrp="1" noRot="1" noChangeAspect="1"/>
+          </p:cNvSpPr>
+          <p:nvPr>
+            <p:ph type="sldImg"/>
+          </p:nvPr>
+        </p:nvSpPr>
+        <p:spPr/>
+      </p:sp>
+      <p:sp>
+        <p:nvSpPr>
+          <p:cNvPr id="3" name="Notes Placeholder 2"/>
+          <p:cNvSpPr>
+            <a:spLocks noGrp="1"/>
+          </p:cNvSpPr>
+          <p:nvPr>
+            <p:ph type="body" idx="1"/>
+          </p:nvPr>
+        </p:nvSpPr>
+        <p:spPr/>
+        <p:txBody>
+          <a:bodyPr/>
+          <a:lstStyle/>
+          <a:p>
+            <a:r>
+              <a:rPr lang="en-US" dirty="0"/>
+              <a:t>Cliffhanger: "Next week we leave the web — crash a C binary with a fuzzer and hijack its execution, then rewrite it in Rust." Remind crAPI pulled before next session.</a:t>
+            </a:r>
+            <a:endParaRPr lang="en-US" dirty="0"/>
+          </a:p>
+        </p:txBody>
+      </p:sp>
+      <p:sp>
+        <p:nvSpPr>
+          <p:cNvPr id="4" name="Slide Number Placeholder 3"/>
+          <p:cNvSpPr>
+            <a:spLocks noGrp="1"/>
+          </p:cNvSpPr>
+          <p:nvPr>
+            <p:ph type="sldNum" sz="quarter" idx="10"/>
+          </p:nvPr>
+        </p:nvSpPr>
+        <p:spPr/>
+        <p:txBody>
+          <a:bodyPr/>
+          <a:lstStyle/>
+          <a:p>
+            <a:fld id="{F7021451-1387-4CA6-816F-3879F97B5CBC}" type="slidenum">
+              <a:rPr lang="en-US"/>
+              <a:t>15</a:t>
             </a:fld>
             <a:endParaRPr lang="en-US"/>
           </a:p>
@@ -1307,7 +1396,7 @@
           <a:p>
             <a:r>
               <a:rPr lang="en-US" dirty="0"/>
-              <a:t>The worked example — this is the crAPI BOLA challenge. Same root cause as W6 IDOR: authenticated, but no per-object ownership check. Ask: "the server knows who I am — why does it still leak 1002?" (it never checks the object belongs to me). ~6 min.</a:t>
+              <a:t>The worked example — this is today's local target (vulnerable_api.py), not crAPI's vehicle-location challenge (which uses GUID ids you can't just increment — don't reuse that worked example against this lab or the ids won't line up). Same root cause as W6 IDOR. Verify before teaching: `get_orders()` in vulnerable_api.py never calls current_user() — grep it live if you doubt this. Toggling X-User-Id (garbage value, wrong id, omitted) makes zero difference; only the URL's own id matters. Don't say "server trusts a client-set header" — that implies a check exists and is merely spoofable. It's simpler and worse than that: no check runs. The fix (solution_api.py) is what actually introduces the X-User-Id comparison — that's where "auth" first exists in this exercise, fake as it is. ~6 min.</a:t>
             </a:r>
             <a:endParaRPr lang="en-US" dirty="0"/>
           </a:p>
@@ -1395,7 +1484,7 @@
           <a:p>
             <a:r>
               <a:rPr lang="en-US" dirty="0"/>
-              <a:t>Walk it: the server takes the JSON and binds every field to the model, including ones the UI never exposes (role, credit, is_verified). This is the crAPI mass-assignment challenge and the weekly quiz Q6. Fix = allow-list the bindable fields. ~5 min.</a:t>
+              <a:t>Walk it: the server takes the whole JSON body and binds it to the model, including fields the UI never exposes (is_admin, balance). This is today's local target's mass-assignment bug and the weekly quiz Q6. Fix = allow-list the bindable fields (ALLOWED_CREATE_FIELDS in solution_api.py). ~5 min.</a:t>
             </a:r>
             <a:endParaRPr lang="en-US" dirty="0"/>
           </a:p>
@@ -1483,7 +1572,7 @@
           <a:p>
             <a:r>
               <a:rPr lang="en-US" dirty="0"/>
-              <a:t>Round out the list. API4 = no rate limit → brute force / cost blowup. Excessive data exposure = API returns the whole user object and the UI just hides fields — attacker reads the raw JSON. ~4 min.</a:t>
+              <a:t>Round out the list. API4 = no rate limit → today's lab actually grades this one (Task 3, 401×5 then 429×2). Flag the API3/"excessive data exposure" taxonomy note pre-emptively — a student cross-checking crAPI's challenge list will see it as separate and think the slide is wrong; it's OWASP's own edition difference. ~4 min.</a:t>
             </a:r>
             <a:endParaRPr lang="en-US" dirty="0"/>
           </a:p>
@@ -1659,7 +1748,7 @@
           <a:p>
             <a:r>
               <a:rPr lang="en-US" dirty="0"/>
-              <a:t>Practical recon for the CTF/midterm-style tasks: enumerate before you exploit. Emphasize ethics + scope: only against provided sandbox targets. This is the "map the attack surface" muscle from W1, applied live. ~4 min.</a:t>
+              <a:t>Practical recon, but be upfront it's not homework this week. Emphasize ethics + scope: only against provided sandbox targets. This is the "map the attack surface" muscle from W1, applied live. ~4 min.</a:t>
             </a:r>
             <a:endParaRPr lang="en-US" dirty="0"/>
           </a:p>
@@ -2316,7 +2405,9 @@
           <a:ln/>
         </p:spPr>
         <p:txBody>
-          <a:bodyPr wrap="square" lIns="0" tIns="0" rIns="0" bIns="0" rtlCol="0" anchor="t"/>
+          <a:bodyPr wrap="square" lIns="0" tIns="0" rIns="0" bIns="0" rtlCol="0" anchor="t">
+            <a:normAutofit/>
+          </a:bodyPr>
           <a:lstStyle/>
           <a:p>
             <a:pPr indent="0" marL="0">
@@ -2331,7 +2422,7 @@
                 <a:ea typeface="Calibri" pitchFamily="34" charset="-122"/>
                 <a:cs typeface="Calibri" pitchFamily="34" charset="-120"/>
               </a:rPr>
-              <a:t>WordPress 404-template RCE → reverse shell:</a:t>
+              <a:t>WordPress 404-template RCE → bind shell:</a:t>
             </a:r>
             <a:endParaRPr lang="en-US" sz="1400" dirty="0"/>
           </a:p>
@@ -2346,11 +2437,11 @@
         <p:spPr>
           <a:xfrm>
             <a:off x="457200" y="1965960"/>
-            <a:ext cx="8229600" cy="1042416"/>
+            <a:ext cx="8229600" cy="932688"/>
           </a:xfrm>
           <a:prstGeom prst="roundRect">
             <a:avLst>
-              <a:gd name="adj" fmla="val 5263"/>
+              <a:gd name="adj" fmla="val 5882"/>
             </a:avLst>
           </a:prstGeom>
           <a:solidFill>
@@ -2373,7 +2464,7 @@
         <p:spPr>
           <a:xfrm>
             <a:off x="640080" y="2039112"/>
-            <a:ext cx="7863840" cy="896112"/>
+            <a:ext cx="7863840" cy="786384"/>
           </a:xfrm>
           <a:prstGeom prst="rect">
             <a:avLst/>
@@ -2382,7 +2473,9 @@
           <a:ln/>
         </p:spPr>
         <p:txBody>
-          <a:bodyPr wrap="square" lIns="0" tIns="0" rIns="0" bIns="0" rtlCol="0" anchor="t"/>
+          <a:bodyPr wrap="square" lIns="0" tIns="0" rIns="0" bIns="0" rtlCol="0" anchor="t">
+            <a:normAutofit/>
+          </a:bodyPr>
           <a:lstStyle/>
           <a:p>
             <a:pPr indent="0" marL="0">
@@ -2445,7 +2538,7 @@
         </p:nvSpPr>
         <p:spPr>
           <a:xfrm>
-            <a:off x="457200" y="3172968"/>
+            <a:off x="457200" y="3063240"/>
             <a:ext cx="8229600" cy="822960"/>
           </a:xfrm>
           <a:prstGeom prst="roundRect">
@@ -2467,7 +2560,7 @@
         </p:nvSpPr>
         <p:spPr>
           <a:xfrm>
-            <a:off x="731520" y="3172968"/>
+            <a:off x="731520" y="3063240"/>
             <a:ext cx="7680960" cy="822960"/>
           </a:xfrm>
           <a:prstGeom prst="rect">
@@ -2477,7 +2570,9 @@
           <a:ln/>
         </p:spPr>
         <p:txBody>
-          <a:bodyPr wrap="square" lIns="0" tIns="0" rIns="0" bIns="0" rtlCol="0" anchor="ctr"/>
+          <a:bodyPr wrap="square" lIns="0" tIns="0" rIns="0" bIns="0" rtlCol="0" anchor="ctr">
+            <a:normAutofit/>
+          </a:bodyPr>
           <a:lstStyle/>
           <a:p>
             <a:pPr indent="0" marL="0">
@@ -2677,7 +2772,7 @@
                 <a:ea typeface="Arial" pitchFamily="34" charset="-122"/>
                 <a:cs typeface="Arial" pitchFamily="34" charset="-120"/>
               </a:rPr>
-              <a:t>🥷 Game — crAPI Raid</a:t>
+              <a:t>🥷 Today's raid — the graded target</a:t>
             </a:r>
             <a:endParaRPr lang="en-US" sz="2600" dirty="0"/>
           </a:p>
@@ -2685,41 +2780,14 @@
       </p:sp>
       <p:sp>
         <p:nvSpPr>
-          <p:cNvPr id="5" name="Shape 2"/>
-          <p:cNvSpPr/>
-          <p:nvPr/>
-        </p:nvSpPr>
-        <p:spPr>
-          <a:xfrm>
-            <a:off x="457200" y="1325880"/>
-            <a:ext cx="8229600" cy="786384"/>
-          </a:xfrm>
-          <a:prstGeom prst="roundRect">
-            <a:avLst>
-              <a:gd name="adj" fmla="val 6977"/>
-            </a:avLst>
-          </a:prstGeom>
-          <a:solidFill>
-            <a:srgbClr val="0A1020"/>
-          </a:solidFill>
-          <a:ln w="12700">
-            <a:solidFill>
-              <a:srgbClr val="E8EDF3"/>
-            </a:solidFill>
-            <a:prstDash val="solid"/>
-          </a:ln>
-        </p:spPr>
-      </p:sp>
-      <p:sp>
-        <p:nvSpPr>
-          <p:cNvPr id="6" name="Text 3"/>
-          <p:cNvSpPr/>
-          <p:nvPr/>
-        </p:nvSpPr>
-        <p:spPr>
-          <a:xfrm>
-            <a:off x="640080" y="1399032"/>
-            <a:ext cx="7863840" cy="640080"/>
+          <p:cNvPr id="5" name="Text 2"/>
+          <p:cNvSpPr/>
+          <p:nvPr/>
+        </p:nvSpPr>
+        <p:spPr>
+          <a:xfrm>
+            <a:off x="548640" y="1325880"/>
+            <a:ext cx="8046720" cy="548640"/>
           </a:xfrm>
           <a:prstGeom prst="rect">
             <a:avLst/>
@@ -2728,53 +2796,38 @@
           <a:ln/>
         </p:spPr>
         <p:txBody>
-          <a:bodyPr wrap="square" lIns="0" tIns="0" rIns="0" bIns="0" rtlCol="0" anchor="t"/>
+          <a:bodyPr wrap="square" lIns="0" tIns="0" rIns="0" bIns="0" rtlCol="0" anchor="t">
+            <a:normAutofit/>
+          </a:bodyPr>
           <a:lstStyle/>
           <a:p>
             <a:pPr indent="0" marL="0">
               <a:buNone/>
             </a:pPr>
             <a:r>
-              <a:rPr lang="en-US" sz="1150" dirty="0">
-                <a:solidFill>
-                  <a:srgbClr val="9FE7D6"/>
-                </a:solidFill>
-                <a:latin typeface="Courier New" pitchFamily="34" charset="0"/>
-                <a:ea typeface="Courier New" pitchFamily="34" charset="-122"/>
-                <a:cs typeface="Courier New" pitchFamily="34" charset="-120"/>
-              </a:rPr>
-              <a:t>git clone https://github.com/OWASP/crAPI.git</a:t>
-            </a:r>
-            <a:endParaRPr lang="en-US" sz="1150" dirty="0"/>
-          </a:p>
-          <a:p>
-            <a:pPr indent="0" marL="0">
-              <a:buNone/>
-            </a:pPr>
-            <a:r>
-              <a:rPr lang="en-US" sz="1150" dirty="0">
-                <a:solidFill>
-                  <a:srgbClr val="9FE7D6"/>
-                </a:solidFill>
-                <a:latin typeface="Courier New" pitchFamily="34" charset="0"/>
-                <a:ea typeface="Courier New" pitchFamily="34" charset="-122"/>
-                <a:cs typeface="Courier New" pitchFamily="34" charset="-120"/>
-              </a:rPr>
-              <a:t>cd crAPI/deploy/docker &amp;&amp; docker compose up -d</a:t>
-            </a:r>
-            <a:endParaRPr lang="en-US" sz="1150" dirty="0"/>
-          </a:p>
-        </p:txBody>
-      </p:sp>
-      <p:sp>
-        <p:nvSpPr>
-          <p:cNvPr id="7" name="Shape 4"/>
-          <p:cNvSpPr/>
-          <p:nvPr/>
-        </p:nvSpPr>
-        <p:spPr>
-          <a:xfrm>
-            <a:off x="502920" y="2276856"/>
+              <a:rPr lang="en-US" sz="1400" dirty="0">
+                <a:solidFill>
+                  <a:srgbClr val="1F2937"/>
+                </a:solidFill>
+                <a:latin typeface="Calibri" pitchFamily="34" charset="0"/>
+                <a:ea typeface="Calibri" pitchFamily="34" charset="-122"/>
+                <a:cs typeface="Calibri" pitchFamily="34" charset="-120"/>
+              </a:rPr>
+              <a:t>Local API, docker compose up → :8080 (vulnerable) / :8081 (fixed):</a:t>
+            </a:r>
+            <a:endParaRPr lang="en-US" sz="1400" dirty="0"/>
+          </a:p>
+        </p:txBody>
+      </p:sp>
+      <p:sp>
+        <p:nvSpPr>
+          <p:cNvPr id="6" name="Shape 3"/>
+          <p:cNvSpPr/>
+          <p:nvPr/>
+        </p:nvSpPr>
+        <p:spPr>
+          <a:xfrm>
+            <a:off x="502920" y="1965960"/>
             <a:ext cx="384048" cy="384048"/>
           </a:xfrm>
           <a:prstGeom prst="ellipse">
@@ -2788,13 +2841,13 @@
       </p:sp>
       <p:sp>
         <p:nvSpPr>
-          <p:cNvPr id="8" name="Text 5"/>
-          <p:cNvSpPr/>
-          <p:nvPr/>
-        </p:nvSpPr>
-        <p:spPr>
-          <a:xfrm>
-            <a:off x="502920" y="2276856"/>
+          <p:cNvPr id="7" name="Text 4"/>
+          <p:cNvSpPr/>
+          <p:nvPr/>
+        </p:nvSpPr>
+        <p:spPr>
+          <a:xfrm>
+            <a:off x="502920" y="1965960"/>
             <a:ext cx="384048" cy="384048"/>
           </a:xfrm>
           <a:prstGeom prst="rect">
@@ -2827,14 +2880,14 @@
       </p:sp>
       <p:sp>
         <p:nvSpPr>
-          <p:cNvPr id="9" name="Text 6"/>
-          <p:cNvSpPr/>
-          <p:nvPr/>
-        </p:nvSpPr>
-        <p:spPr>
-          <a:xfrm>
-            <a:off x="1051560" y="2276856"/>
-            <a:ext cx="7589520" cy="384048"/>
+          <p:cNvPr id="8" name="Text 5"/>
+          <p:cNvSpPr/>
+          <p:nvPr/>
+        </p:nvSpPr>
+        <p:spPr>
+          <a:xfrm>
+            <a:off x="1051560" y="1965960"/>
+            <a:ext cx="7589520" cy="658368"/>
           </a:xfrm>
           <a:prstGeom prst="rect">
             <a:avLst/>
@@ -2843,7 +2896,9 @@
           <a:ln/>
         </p:spPr>
         <p:txBody>
-          <a:bodyPr wrap="square" lIns="0" tIns="0" rIns="0" bIns="0" rtlCol="0" anchor="ctr"/>
+          <a:bodyPr wrap="square" lIns="0" tIns="0" rIns="0" bIns="0" rtlCol="0" anchor="ctr">
+            <a:normAutofit/>
+          </a:bodyPr>
           <a:lstStyle/>
           <a:p>
             <a:pPr indent="0" marL="0">
@@ -2858,7 +2913,7 @@
                 <a:ea typeface="Calibri" pitchFamily="34" charset="-122"/>
                 <a:cs typeface="Calibri" pitchFamily="34" charset="-120"/>
               </a:rPr>
-              <a:t>BOLA: read another user's vehicle/order</a:t>
+              <a:t>BOLA: 401 → 403 → 200 — probe, get denied, then read another user's orders as yourself</a:t>
             </a:r>
             <a:endParaRPr lang="en-US" sz="1350" dirty="0"/>
           </a:p>
@@ -2866,13 +2921,13 @@
       </p:sp>
       <p:sp>
         <p:nvSpPr>
-          <p:cNvPr id="10" name="Shape 7"/>
-          <p:cNvSpPr/>
-          <p:nvPr/>
-        </p:nvSpPr>
-        <p:spPr>
-          <a:xfrm>
-            <a:off x="502920" y="2734056"/>
+          <p:cNvPr id="9" name="Shape 6"/>
+          <p:cNvSpPr/>
+          <p:nvPr/>
+        </p:nvSpPr>
+        <p:spPr>
+          <a:xfrm>
+            <a:off x="502920" y="2697480"/>
             <a:ext cx="384048" cy="384048"/>
           </a:xfrm>
           <a:prstGeom prst="ellipse">
@@ -2886,13 +2941,13 @@
       </p:sp>
       <p:sp>
         <p:nvSpPr>
-          <p:cNvPr id="11" name="Text 8"/>
-          <p:cNvSpPr/>
-          <p:nvPr/>
-        </p:nvSpPr>
-        <p:spPr>
-          <a:xfrm>
-            <a:off x="502920" y="2734056"/>
+          <p:cNvPr id="10" name="Text 7"/>
+          <p:cNvSpPr/>
+          <p:nvPr/>
+        </p:nvSpPr>
+        <p:spPr>
+          <a:xfrm>
+            <a:off x="502920" y="2697480"/>
             <a:ext cx="384048" cy="384048"/>
           </a:xfrm>
           <a:prstGeom prst="rect">
@@ -2925,14 +2980,14 @@
       </p:sp>
       <p:sp>
         <p:nvSpPr>
-          <p:cNvPr id="12" name="Text 9"/>
-          <p:cNvSpPr/>
-          <p:nvPr/>
-        </p:nvSpPr>
-        <p:spPr>
-          <a:xfrm>
-            <a:off x="1051560" y="2734056"/>
-            <a:ext cx="7589520" cy="384048"/>
+          <p:cNvPr id="11" name="Text 8"/>
+          <p:cNvSpPr/>
+          <p:nvPr/>
+        </p:nvSpPr>
+        <p:spPr>
+          <a:xfrm>
+            <a:off x="1051560" y="2697480"/>
+            <a:ext cx="7589520" cy="402336"/>
           </a:xfrm>
           <a:prstGeom prst="rect">
             <a:avLst/>
@@ -2941,7 +2996,9 @@
           <a:ln/>
         </p:spPr>
         <p:txBody>
-          <a:bodyPr wrap="square" lIns="0" tIns="0" rIns="0" bIns="0" rtlCol="0" anchor="ctr"/>
+          <a:bodyPr wrap="square" lIns="0" tIns="0" rIns="0" bIns="0" rtlCol="0" anchor="ctr">
+            <a:normAutofit/>
+          </a:bodyPr>
           <a:lstStyle/>
           <a:p>
             <a:pPr indent="0" marL="0">
@@ -2956,7 +3013,7 @@
                 <a:ea typeface="Calibri" pitchFamily="34" charset="-122"/>
                 <a:cs typeface="Calibri" pitchFamily="34" charset="-120"/>
               </a:rPr>
-              <a:t>Mass assignment: set a forbidden field</a:t>
+              <a:t>Mass assignment: smuggle is_admin/balance into account creation</a:t>
             </a:r>
             <a:endParaRPr lang="en-US" sz="1350" dirty="0"/>
           </a:p>
@@ -2964,13 +3021,13 @@
       </p:sp>
       <p:sp>
         <p:nvSpPr>
-          <p:cNvPr id="13" name="Shape 10"/>
-          <p:cNvSpPr/>
-          <p:nvPr/>
-        </p:nvSpPr>
-        <p:spPr>
-          <a:xfrm>
-            <a:off x="502920" y="3191256"/>
+          <p:cNvPr id="12" name="Shape 9"/>
+          <p:cNvSpPr/>
+          <p:nvPr/>
+        </p:nvSpPr>
+        <p:spPr>
+          <a:xfrm>
+            <a:off x="502920" y="3172968"/>
             <a:ext cx="384048" cy="384048"/>
           </a:xfrm>
           <a:prstGeom prst="ellipse">
@@ -2984,13 +3041,13 @@
       </p:sp>
       <p:sp>
         <p:nvSpPr>
-          <p:cNvPr id="14" name="Text 11"/>
-          <p:cNvSpPr/>
-          <p:nvPr/>
-        </p:nvSpPr>
-        <p:spPr>
-          <a:xfrm>
-            <a:off x="502920" y="3191256"/>
+          <p:cNvPr id="13" name="Text 10"/>
+          <p:cNvSpPr/>
+          <p:nvPr/>
+        </p:nvSpPr>
+        <p:spPr>
+          <a:xfrm>
+            <a:off x="502920" y="3172968"/>
             <a:ext cx="384048" cy="384048"/>
           </a:xfrm>
           <a:prstGeom prst="rect">
@@ -3023,14 +3080,14 @@
       </p:sp>
       <p:sp>
         <p:nvSpPr>
-          <p:cNvPr id="15" name="Text 12"/>
-          <p:cNvSpPr/>
-          <p:nvPr/>
-        </p:nvSpPr>
-        <p:spPr>
-          <a:xfrm>
-            <a:off x="1051560" y="3191256"/>
-            <a:ext cx="7589520" cy="384048"/>
+          <p:cNvPr id="14" name="Text 11"/>
+          <p:cNvSpPr/>
+          <p:nvPr/>
+        </p:nvSpPr>
+        <p:spPr>
+          <a:xfrm>
+            <a:off x="1051560" y="3172968"/>
+            <a:ext cx="7589520" cy="402336"/>
           </a:xfrm>
           <a:prstGeom prst="rect">
             <a:avLst/>
@@ -3039,7 +3096,9 @@
           <a:ln/>
         </p:spPr>
         <p:txBody>
-          <a:bodyPr wrap="square" lIns="0" tIns="0" rIns="0" bIns="0" rtlCol="0" anchor="ctr"/>
+          <a:bodyPr wrap="square" lIns="0" tIns="0" rIns="0" bIns="0" rtlCol="0" anchor="ctr">
+            <a:normAutofit/>
+          </a:bodyPr>
           <a:lstStyle/>
           <a:p>
             <a:pPr indent="0" marL="0">
@@ -3054,7 +3113,7 @@
                 <a:ea typeface="Calibri" pitchFamily="34" charset="-122"/>
                 <a:cs typeface="Calibri" pitchFamily="34" charset="-120"/>
               </a:rPr>
-              <a:t>Resource consumption: hit an unthrottled endpoint</a:t>
+              <a:t>Resource consumption: 401×5 → 429×2 on /api/login</a:t>
             </a:r>
             <a:endParaRPr lang="en-US" sz="1350" dirty="0"/>
           </a:p>
@@ -3062,7 +3121,7 @@
       </p:sp>
       <p:sp>
         <p:nvSpPr>
-          <p:cNvPr id="16" name="Shape 13"/>
+          <p:cNvPr id="15" name="Shape 12"/>
           <p:cNvSpPr/>
           <p:nvPr/>
         </p:nvSpPr>
@@ -3082,7 +3141,7 @@
       </p:sp>
       <p:sp>
         <p:nvSpPr>
-          <p:cNvPr id="17" name="Text 14"/>
+          <p:cNvPr id="16" name="Text 13"/>
           <p:cNvSpPr/>
           <p:nvPr/>
         </p:nvSpPr>
@@ -3121,14 +3180,14 @@
       </p:sp>
       <p:sp>
         <p:nvSpPr>
-          <p:cNvPr id="18" name="Text 15"/>
+          <p:cNvPr id="17" name="Text 14"/>
           <p:cNvSpPr/>
           <p:nvPr/>
         </p:nvSpPr>
         <p:spPr>
           <a:xfrm>
             <a:off x="1051560" y="3648456"/>
-            <a:ext cx="7589520" cy="384048"/>
+            <a:ext cx="7589520" cy="402336"/>
           </a:xfrm>
           <a:prstGeom prst="rect">
             <a:avLst/>
@@ -3137,7 +3196,9 @@
           <a:ln/>
         </p:spPr>
         <p:txBody>
-          <a:bodyPr wrap="square" lIns="0" tIns="0" rIns="0" bIns="0" rtlCol="0" anchor="ctr"/>
+          <a:bodyPr wrap="square" lIns="0" tIns="0" rIns="0" bIns="0" rtlCol="0" anchor="ctr">
+            <a:normAutofit/>
+          </a:bodyPr>
           <a:lstStyle/>
           <a:p>
             <a:pPr indent="0" marL="0">
@@ -3152,7 +3213,7 @@
                 <a:ea typeface="Calibri" pitchFamily="34" charset="-122"/>
                 <a:cs typeface="Calibri" pitchFamily="34" charset="-120"/>
               </a:rPr>
-              <a:t>Round 2: add authz + schema validation + rate limiting</a:t>
+              <a:t>Defend: switch to the pre-written solution_api.py, cite the exact fix line for each</a:t>
             </a:r>
             <a:endParaRPr lang="en-US" sz="1350" dirty="0"/>
           </a:p>
@@ -3160,7 +3221,7 @@
       </p:sp>
       <p:sp>
         <p:nvSpPr>
-          <p:cNvPr id="19" name="Text 16"/>
+          <p:cNvPr id="18" name="Text 15"/>
           <p:cNvSpPr/>
           <p:nvPr/>
         </p:nvSpPr>
@@ -3199,7 +3260,7 @@
       </p:sp>
       <p:pic>
         <p:nvPicPr>
-          <p:cNvPr id="20" name="Image 1" descr="/Users/pop7/Library/CloudStorage/OneDrive-MonsterConnectCo.,Ltd/Lecture/KOSEN69 - software-security/slides/pptx/assets/logo-small.png">    </p:cNvPr>
+          <p:cNvPr id="19" name="Image 1" descr="/Users/pop7/Library/CloudStorage/OneDrive-MonsterConnectCo.,Ltd/Lecture/KOSEN69 - software-security/slides/pptx/assets/logo-small.png">    </p:cNvPr>
           <p:cNvPicPr>
             <a:picLocks noChangeAspect="1"/>
           </p:cNvPicPr>
@@ -3337,7 +3398,7 @@
                 <a:ea typeface="Arial" pitchFamily="34" charset="-122"/>
                 <a:cs typeface="Arial" pitchFamily="34" charset="-120"/>
               </a:rPr>
-              <a:t>Deliverable</a:t>
+              <a:t>🥷 Today's raid — the graded target (cont.)</a:t>
             </a:r>
             <a:endParaRPr lang="en-US" sz="2600" dirty="0"/>
           </a:p>
@@ -3383,7 +3444,9 @@
           <a:ln/>
         </p:spPr>
         <p:txBody>
-          <a:bodyPr wrap="square" lIns="0" tIns="0" rIns="0" bIns="0" rtlCol="0" anchor="ctr"/>
+          <a:bodyPr wrap="square" lIns="0" tIns="0" rIns="0" bIns="0" rtlCol="0" anchor="ctr">
+            <a:normAutofit/>
+          </a:bodyPr>
           <a:lstStyle/>
           <a:p>
             <a:pPr indent="0" marL="0">
@@ -3398,7 +3461,7 @@
                 <a:ea typeface="Calibri" pitchFamily="34" charset="-122"/>
                 <a:cs typeface="Calibri" pitchFamily="34" charset="-120"/>
               </a:rPr>
-              <a:t>📋 Worksheet 10 — labs/week10-api-security/worksheet.md (Part 3) · kickoff: docker compose up → :8080 (insecure) / :8081 (secure)</a:t>
+              <a:t>Bonus (optional, ~20 min): crAPI — OWASP's own intentionally-vulnerable API, real GUID-based BOLA, capture-only, no fix step, no separate grade</a:t>
             </a:r>
             <a:endParaRPr lang="en-US" sz="1400" dirty="0"/>
           </a:p>
@@ -3406,43 +3469,14 @@
       </p:sp>
       <p:sp>
         <p:nvSpPr>
-          <p:cNvPr id="7" name="Shape 4"/>
-          <p:cNvSpPr/>
-          <p:nvPr/>
-        </p:nvSpPr>
-        <p:spPr>
-          <a:xfrm>
-            <a:off x="457200" y="2313432"/>
-            <a:ext cx="8229600" cy="1517904"/>
-          </a:xfrm>
-          <a:prstGeom prst="roundRect">
-            <a:avLst>
-              <a:gd name="adj" fmla="val 4819"/>
-            </a:avLst>
-          </a:prstGeom>
-          <a:solidFill>
-            <a:srgbClr val="F1F5F9"/>
-          </a:solidFill>
-          <a:ln/>
-          <a:effectLst>
-            <a:outerShdw sx="100000" sy="100000" kx="0" ky="0" algn="bl" rotWithShape="0" blurRad="76200" dist="25400" dir="5400000">
-              <a:srgbClr val="000000">
-                <a:alpha val="12000"/>
-              </a:srgbClr>
-            </a:outerShdw>
-          </a:effectLst>
-        </p:spPr>
-      </p:sp>
-      <p:sp>
-        <p:nvSpPr>
-          <p:cNvPr id="8" name="Text 5"/>
-          <p:cNvSpPr/>
-          <p:nvPr/>
-        </p:nvSpPr>
-        <p:spPr>
-          <a:xfrm>
-            <a:off x="731520" y="2423160"/>
-            <a:ext cx="7680960" cy="1298448"/>
+          <p:cNvPr id="7" name="Text 4"/>
+          <p:cNvSpPr/>
+          <p:nvPr/>
+        </p:nvSpPr>
+        <p:spPr>
+          <a:xfrm>
+            <a:off x="457200" y="4800600"/>
+            <a:ext cx="6949440" cy="274320"/>
           </a:xfrm>
           <a:prstGeom prst="rect">
             <a:avLst/>
@@ -3451,127 +3485,21 @@
           <a:ln/>
         </p:spPr>
         <p:txBody>
-          <a:bodyPr wrap="square" lIns="0" tIns="0" rIns="0" bIns="0" rtlCol="0" anchor="t"/>
-          <a:lstStyle/>
-          <a:p>
-            <a:pPr marL="342900" indent="-342900">
-              <a:spcAft>
-                <a:spcPts val="600"/>
-              </a:spcAft>
-              <a:buSzPct val="100000"/>
-              <a:buChar char="•"/>
-            </a:pPr>
-            <a:r>
-              <a:rPr lang="en-US" sz="1400" dirty="0">
-                <a:solidFill>
-                  <a:srgbClr val="1F2937"/>
+          <a:bodyPr wrap="square" lIns="0" tIns="0" rIns="0" bIns="0" rtlCol="0" anchor="ctr"/>
+          <a:lstStyle/>
+          <a:p>
+            <a:pPr indent="0" marL="0">
+              <a:buNone/>
+            </a:pPr>
+            <a:r>
+              <a:rPr lang="en-US" sz="900" dirty="0">
+                <a:solidFill>
+                  <a:srgbClr val="64748B"/>
                 </a:solidFill>
                 <a:latin typeface="Calibri" pitchFamily="34" charset="0"/>
                 <a:ea typeface="Calibri" pitchFamily="34" charset="-122"/>
                 <a:cs typeface="Calibri" pitchFamily="34" charset="-120"/>
               </a:rPr>
-              <a:t>Findings mapped to the API Top 10</a:t>
-            </a:r>
-            <a:endParaRPr lang="en-US" sz="1400" dirty="0"/>
-          </a:p>
-          <a:p>
-            <a:pPr marL="342900" indent="-342900">
-              <a:spcAft>
-                <a:spcPts val="600"/>
-              </a:spcAft>
-              <a:buSzPct val="100000"/>
-              <a:buChar char="•"/>
-            </a:pPr>
-            <a:r>
-              <a:rPr lang="en-US" sz="1400" dirty="0">
-                <a:solidFill>
-                  <a:srgbClr val="1F2937"/>
-                </a:solidFill>
-                <a:latin typeface="Calibri" pitchFamily="34" charset="0"/>
-                <a:ea typeface="Calibri" pitchFamily="34" charset="-122"/>
-                <a:cs typeface="Calibri" pitchFamily="34" charset="-120"/>
-              </a:rPr>
-              <a:t>Fixes (authz checks, schemas, limits)</a:t>
-            </a:r>
-            <a:endParaRPr lang="en-US" sz="1400" dirty="0"/>
-          </a:p>
-          <a:p>
-            <a:pPr marL="342900" indent="-342900">
-              <a:spcAft>
-                <a:spcPts val="600"/>
-              </a:spcAft>
-              <a:buSzPct val="100000"/>
-              <a:buChar char="•"/>
-            </a:pPr>
-            <a:r>
-              <a:rPr lang="en-US" sz="1400" dirty="0">
-                <a:solidFill>
-                  <a:srgbClr val="1F2937"/>
-                </a:solidFill>
-                <a:latin typeface="Calibri" pitchFamily="34" charset="0"/>
-                <a:ea typeface="Calibri" pitchFamily="34" charset="-122"/>
-                <a:cs typeface="Calibri" pitchFamily="34" charset="-120"/>
-              </a:rPr>
-              <a:t>Proof exploits now fail</a:t>
-            </a:r>
-            <a:endParaRPr lang="en-US" sz="1400" dirty="0"/>
-          </a:p>
-          <a:p>
-            <a:pPr marL="342900" indent="-342900">
-              <a:spcAft>
-                <a:spcPts val="600"/>
-              </a:spcAft>
-              <a:buSzPct val="100000"/>
-              <a:buChar char="•"/>
-            </a:pPr>
-            <a:r>
-              <a:rPr lang="en-US" sz="1400" dirty="0">
-                <a:solidFill>
-                  <a:srgbClr val="1F2937"/>
-                </a:solidFill>
-                <a:latin typeface="Calibri" pitchFamily="34" charset="0"/>
-                <a:ea typeface="Calibri" pitchFamily="34" charset="-122"/>
-                <a:cs typeface="Calibri" pitchFamily="34" charset="-120"/>
-              </a:rPr>
-              <a:t>+ Audit the AI / EiPE / Prompt Problem (see worksheet)</a:t>
-            </a:r>
-            <a:endParaRPr lang="en-US" sz="1400" dirty="0"/>
-          </a:p>
-        </p:txBody>
-      </p:sp>
-      <p:sp>
-        <p:nvSpPr>
-          <p:cNvPr id="9" name="Text 6"/>
-          <p:cNvSpPr/>
-          <p:nvPr/>
-        </p:nvSpPr>
-        <p:spPr>
-          <a:xfrm>
-            <a:off x="457200" y="4800600"/>
-            <a:ext cx="6949440" cy="274320"/>
-          </a:xfrm>
-          <a:prstGeom prst="rect">
-            <a:avLst/>
-          </a:prstGeom>
-          <a:noFill/>
-          <a:ln/>
-        </p:spPr>
-        <p:txBody>
-          <a:bodyPr wrap="square" lIns="0" tIns="0" rIns="0" bIns="0" rtlCol="0" anchor="ctr"/>
-          <a:lstStyle/>
-          <a:p>
-            <a:pPr indent="0" marL="0">
-              <a:buNone/>
-            </a:pPr>
-            <a:r>
-              <a:rPr lang="en-US" sz="900" dirty="0">
-                <a:solidFill>
-                  <a:srgbClr val="64748B"/>
-                </a:solidFill>
-                <a:latin typeface="Calibri" pitchFamily="34" charset="0"/>
-                <a:ea typeface="Calibri" pitchFamily="34" charset="-122"/>
-                <a:cs typeface="Calibri" pitchFamily="34" charset="-120"/>
-              </a:rPr>
               <a:t>Software Security · Week 10</a:t>
             </a:r>
             <a:endParaRPr lang="en-US" sz="900" dirty="0"/>
@@ -3580,7 +3508,7 @@
       </p:sp>
       <p:pic>
         <p:nvPicPr>
-          <p:cNvPr id="10" name="Image 1" descr="/Users/pop7/Library/CloudStorage/OneDrive-MonsterConnectCo.,Ltd/Lecture/KOSEN69 - software-security/slides/pptx/assets/logo-small.png">    </p:cNvPr>
+          <p:cNvPr id="8" name="Image 1" descr="/Users/pop7/Library/CloudStorage/OneDrive-MonsterConnectCo.,Ltd/Lecture/KOSEN69 - software-security/slides/pptx/assets/logo-small.png">    </p:cNvPr>
           <p:cNvPicPr>
             <a:picLocks noChangeAspect="1"/>
           </p:cNvPicPr>
@@ -3718,7 +3646,7 @@
                 <a:ea typeface="Arial" pitchFamily="34" charset="-122"/>
                 <a:cs typeface="Arial" pitchFamily="34" charset="-120"/>
               </a:rPr>
-              <a:t>Key takeaways</a:t>
+              <a:t>Deliverable</a:t>
             </a:r>
             <a:endParaRPr lang="en-US" sz="2600" dirty="0"/>
           </a:p>
@@ -3733,11 +3661,74 @@
         <p:spPr>
           <a:xfrm>
             <a:off x="457200" y="1325880"/>
-            <a:ext cx="8229600" cy="1207008"/>
+            <a:ext cx="8229600" cy="822960"/>
           </a:xfrm>
           <a:prstGeom prst="roundRect">
             <a:avLst>
-              <a:gd name="adj" fmla="val 6061"/>
+              <a:gd name="adj" fmla="val 8889"/>
+            </a:avLst>
+          </a:prstGeom>
+          <a:solidFill>
+            <a:srgbClr val="E8EDF3"/>
+          </a:solidFill>
+          <a:ln/>
+        </p:spPr>
+      </p:sp>
+      <p:sp>
+        <p:nvSpPr>
+          <p:cNvPr id="6" name="Text 3"/>
+          <p:cNvSpPr/>
+          <p:nvPr/>
+        </p:nvSpPr>
+        <p:spPr>
+          <a:xfrm>
+            <a:off x="731520" y="1325880"/>
+            <a:ext cx="7680960" cy="822960"/>
+          </a:xfrm>
+          <a:prstGeom prst="rect">
+            <a:avLst/>
+          </a:prstGeom>
+          <a:noFill/>
+          <a:ln/>
+        </p:spPr>
+        <p:txBody>
+          <a:bodyPr wrap="square" lIns="0" tIns="0" rIns="0" bIns="0" rtlCol="0" anchor="ctr">
+            <a:normAutofit/>
+          </a:bodyPr>
+          <a:lstStyle/>
+          <a:p>
+            <a:pPr indent="0" marL="0">
+              <a:buNone/>
+            </a:pPr>
+            <a:r>
+              <a:rPr lang="en-US" sz="1400" i="1" dirty="0">
+                <a:solidFill>
+                  <a:srgbClr val="E35205"/>
+                </a:solidFill>
+                <a:latin typeface="Calibri" pitchFamily="34" charset="0"/>
+                <a:ea typeface="Calibri" pitchFamily="34" charset="-122"/>
+                <a:cs typeface="Calibri" pitchFamily="34" charset="-120"/>
+              </a:rPr>
+              <a:t>📋 Worksheet 10 — labs/week10-api-security/worksheet.md (Part 3) · kickoff: docker compose up → :8080 (insecure) / :8081 (secure)</a:t>
+            </a:r>
+            <a:endParaRPr lang="en-US" sz="1400" dirty="0"/>
+          </a:p>
+        </p:txBody>
+      </p:sp>
+      <p:sp>
+        <p:nvSpPr>
+          <p:cNvPr id="7" name="Shape 4"/>
+          <p:cNvSpPr/>
+          <p:nvPr/>
+        </p:nvSpPr>
+        <p:spPr>
+          <a:xfrm>
+            <a:off x="457200" y="2313432"/>
+            <a:ext cx="8229600" cy="1719072"/>
+          </a:xfrm>
+          <a:prstGeom prst="roundRect">
+            <a:avLst>
+              <a:gd name="adj" fmla="val 4255"/>
             </a:avLst>
           </a:prstGeom>
           <a:solidFill>
@@ -3755,14 +3746,14 @@
       </p:sp>
       <p:sp>
         <p:nvSpPr>
-          <p:cNvPr id="6" name="Text 3"/>
-          <p:cNvSpPr/>
-          <p:nvPr/>
-        </p:nvSpPr>
-        <p:spPr>
-          <a:xfrm>
-            <a:off x="731520" y="1435608"/>
-            <a:ext cx="7680960" cy="987552"/>
+          <p:cNvPr id="8" name="Text 5"/>
+          <p:cNvSpPr/>
+          <p:nvPr/>
+        </p:nvSpPr>
+        <p:spPr>
+          <a:xfrm>
+            <a:off x="731520" y="2423160"/>
+            <a:ext cx="7680960" cy="1499616"/>
           </a:xfrm>
           <a:prstGeom prst="rect">
             <a:avLst/>
@@ -3771,7 +3762,9 @@
           <a:ln/>
         </p:spPr>
         <p:txBody>
-          <a:bodyPr wrap="square" lIns="0" tIns="0" rIns="0" bIns="0" rtlCol="0" anchor="t"/>
+          <a:bodyPr wrap="square" lIns="0" tIns="0" rIns="0" bIns="0" rtlCol="0" anchor="t">
+            <a:normAutofit/>
+          </a:bodyPr>
           <a:lstStyle/>
           <a:p>
             <a:pPr marL="342900" indent="-342900">
@@ -3790,7 +3783,7 @@
                 <a:ea typeface="Calibri" pitchFamily="34" charset="-122"/>
                 <a:cs typeface="Calibri" pitchFamily="34" charset="-120"/>
               </a:rPr>
-              <a:t>BOLA/IDOR is the dominant API bug — check ownership</a:t>
+              <a:t>Findings mapped to the API Top 10:2023 + your two personal flags (FLAG_BOLA, FLAG_MASSASSIGN)</a:t>
             </a:r>
             <a:endParaRPr lang="en-US" sz="1400" dirty="0"/>
           </a:p>
@@ -3811,7 +3804,7 @@
                 <a:ea typeface="Calibri" pitchFamily="34" charset="-122"/>
                 <a:cs typeface="Calibri" pitchFamily="34" charset="-120"/>
               </a:rPr>
-              <a:t>Bind only fields you intend</a:t>
+              <a:t>Fixes (authz checks, schemas, limits) — cited from solution_api.py</a:t>
             </a:r>
             <a:endParaRPr lang="en-US" sz="1400" dirty="0"/>
           </a:p>
@@ -3832,45 +3825,66 @@
                 <a:ea typeface="Calibri" pitchFamily="34" charset="-122"/>
                 <a:cs typeface="Calibri" pitchFamily="34" charset="-120"/>
               </a:rPr>
-              <a:t>Validate and throttle everything</a:t>
+              <a:t>Proof exploits now fail</a:t>
             </a:r>
             <a:endParaRPr lang="en-US" sz="1400" dirty="0"/>
           </a:p>
-        </p:txBody>
-      </p:sp>
-      <p:sp>
-        <p:nvSpPr>
-          <p:cNvPr id="7" name="Text 4"/>
-          <p:cNvSpPr/>
-          <p:nvPr/>
-        </p:nvSpPr>
-        <p:spPr>
-          <a:xfrm>
-            <a:off x="457200" y="4800600"/>
-            <a:ext cx="6949440" cy="274320"/>
-          </a:xfrm>
-          <a:prstGeom prst="rect">
-            <a:avLst/>
-          </a:prstGeom>
-          <a:noFill/>
-          <a:ln/>
-        </p:spPr>
-        <p:txBody>
-          <a:bodyPr wrap="square" lIns="0" tIns="0" rIns="0" bIns="0" rtlCol="0" anchor="ctr"/>
-          <a:lstStyle/>
-          <a:p>
-            <a:pPr indent="0" marL="0">
-              <a:buNone/>
-            </a:pPr>
-            <a:r>
-              <a:rPr lang="en-US" sz="900" dirty="0">
-                <a:solidFill>
-                  <a:srgbClr val="64748B"/>
+          <a:p>
+            <a:pPr marL="342900" indent="-342900">
+              <a:spcAft>
+                <a:spcPts val="600"/>
+              </a:spcAft>
+              <a:buSzPct val="100000"/>
+              <a:buChar char="•"/>
+            </a:pPr>
+            <a:r>
+              <a:rPr lang="en-US" sz="1400" dirty="0">
+                <a:solidFill>
+                  <a:srgbClr val="1F2937"/>
                 </a:solidFill>
                 <a:latin typeface="Calibri" pitchFamily="34" charset="0"/>
                 <a:ea typeface="Calibri" pitchFamily="34" charset="-122"/>
                 <a:cs typeface="Calibri" pitchFamily="34" charset="-120"/>
               </a:rPr>
+              <a:t>+ Audit the AI / EiPE / Prompt Problem (see worksheet)</a:t>
+            </a:r>
+            <a:endParaRPr lang="en-US" sz="1400" dirty="0"/>
+          </a:p>
+        </p:txBody>
+      </p:sp>
+      <p:sp>
+        <p:nvSpPr>
+          <p:cNvPr id="9" name="Text 6"/>
+          <p:cNvSpPr/>
+          <p:nvPr/>
+        </p:nvSpPr>
+        <p:spPr>
+          <a:xfrm>
+            <a:off x="457200" y="4800600"/>
+            <a:ext cx="6949440" cy="274320"/>
+          </a:xfrm>
+          <a:prstGeom prst="rect">
+            <a:avLst/>
+          </a:prstGeom>
+          <a:noFill/>
+          <a:ln/>
+        </p:spPr>
+        <p:txBody>
+          <a:bodyPr wrap="square" lIns="0" tIns="0" rIns="0" bIns="0" rtlCol="0" anchor="ctr"/>
+          <a:lstStyle/>
+          <a:p>
+            <a:pPr indent="0" marL="0">
+              <a:buNone/>
+            </a:pPr>
+            <a:r>
+              <a:rPr lang="en-US" sz="900" dirty="0">
+                <a:solidFill>
+                  <a:srgbClr val="64748B"/>
+                </a:solidFill>
+                <a:latin typeface="Calibri" pitchFamily="34" charset="0"/>
+                <a:ea typeface="Calibri" pitchFamily="34" charset="-122"/>
+                <a:cs typeface="Calibri" pitchFamily="34" charset="-120"/>
+              </a:rPr>
               <a:t>Software Security · Week 10</a:t>
             </a:r>
             <a:endParaRPr lang="en-US" sz="900" dirty="0"/>
@@ -3879,7 +3893,7 @@
       </p:sp>
       <p:pic>
         <p:nvPicPr>
-          <p:cNvPr id="8" name="Image 1" descr="/Users/pop7/Library/CloudStorage/OneDrive-MonsterConnectCo.,Ltd/Lecture/KOSEN69 - software-security/slides/pptx/assets/logo-small.png">    </p:cNvPr>
+          <p:cNvPr id="10" name="Image 1" descr="/Users/pop7/Library/CloudStorage/OneDrive-MonsterConnectCo.,Ltd/Lecture/KOSEN69 - software-security/slides/pptx/assets/logo-small.png">    </p:cNvPr>
           <p:cNvPicPr>
             <a:picLocks noChangeAspect="1"/>
           </p:cNvPicPr>
@@ -3935,6 +3949,307 @@
       </p:grpSpPr>
       <p:sp>
         <p:nvSpPr>
+          <p:cNvPr id="2" name="Shape 0"/>
+          <p:cNvSpPr/>
+          <p:nvPr/>
+        </p:nvSpPr>
+        <p:spPr>
+          <a:xfrm>
+            <a:off x="457200" y="384048"/>
+            <a:ext cx="530352" cy="530352"/>
+          </a:xfrm>
+          <a:prstGeom prst="ellipse">
+            <a:avLst/>
+          </a:prstGeom>
+          <a:solidFill>
+            <a:srgbClr val="E35205"/>
+          </a:solidFill>
+          <a:ln/>
+          <a:effectLst>
+            <a:outerShdw sx="100000" sy="100000" kx="0" ky="0" algn="bl" rotWithShape="0" blurRad="76200" dist="25400" dir="5400000">
+              <a:srgbClr val="000000">
+                <a:alpha val="12000"/>
+              </a:srgbClr>
+            </a:outerShdw>
+          </a:effectLst>
+        </p:spPr>
+      </p:sp>
+      <p:pic>
+        <p:nvPicPr>
+          <p:cNvPr id="3" name="Image 0" descr="preencoded.png">    </p:cNvPr>
+          <p:cNvPicPr>
+            <a:picLocks noChangeAspect="1"/>
+          </p:cNvPicPr>
+          <p:nvPr/>
+        </p:nvPicPr>
+        <p:blipFill>
+          <a:blip r:embed="rId1"/>
+          <a:stretch>
+            <a:fillRect/>
+          </a:stretch>
+        </p:blipFill>
+        <p:spPr>
+          <a:xfrm>
+            <a:off x="594360" y="521208"/>
+            <a:ext cx="256032" cy="256032"/>
+          </a:xfrm>
+          <a:prstGeom prst="rect">
+            <a:avLst/>
+          </a:prstGeom>
+        </p:spPr>
+      </p:pic>
+      <p:sp>
+        <p:nvSpPr>
+          <p:cNvPr id="4" name="Text 1"/>
+          <p:cNvSpPr/>
+          <p:nvPr/>
+        </p:nvSpPr>
+        <p:spPr>
+          <a:xfrm>
+            <a:off x="1143000" y="329184"/>
+            <a:ext cx="7498080" cy="603504"/>
+          </a:xfrm>
+          <a:prstGeom prst="rect">
+            <a:avLst/>
+          </a:prstGeom>
+          <a:noFill/>
+          <a:ln/>
+        </p:spPr>
+        <p:txBody>
+          <a:bodyPr wrap="square" lIns="0" tIns="0" rIns="0" bIns="0" rtlCol="0" anchor="ctr"/>
+          <a:lstStyle/>
+          <a:p>
+            <a:pPr indent="0" marL="0">
+              <a:buNone/>
+            </a:pPr>
+            <a:r>
+              <a:rPr lang="en-US" sz="2600" b="1" dirty="0">
+                <a:solidFill>
+                  <a:srgbClr val="1F2937"/>
+                </a:solidFill>
+                <a:latin typeface="Arial" pitchFamily="34" charset="0"/>
+                <a:ea typeface="Arial" pitchFamily="34" charset="-122"/>
+                <a:cs typeface="Arial" pitchFamily="34" charset="-120"/>
+              </a:rPr>
+              <a:t>Key takeaways</a:t>
+            </a:r>
+            <a:endParaRPr lang="en-US" sz="2600" dirty="0"/>
+          </a:p>
+        </p:txBody>
+      </p:sp>
+      <p:sp>
+        <p:nvSpPr>
+          <p:cNvPr id="5" name="Shape 2"/>
+          <p:cNvSpPr/>
+          <p:nvPr/>
+        </p:nvSpPr>
+        <p:spPr>
+          <a:xfrm>
+            <a:off x="457200" y="1325880"/>
+            <a:ext cx="8229600" cy="1207008"/>
+          </a:xfrm>
+          <a:prstGeom prst="roundRect">
+            <a:avLst>
+              <a:gd name="adj" fmla="val 6061"/>
+            </a:avLst>
+          </a:prstGeom>
+          <a:solidFill>
+            <a:srgbClr val="F1F5F9"/>
+          </a:solidFill>
+          <a:ln/>
+          <a:effectLst>
+            <a:outerShdw sx="100000" sy="100000" kx="0" ky="0" algn="bl" rotWithShape="0" blurRad="76200" dist="25400" dir="5400000">
+              <a:srgbClr val="000000">
+                <a:alpha val="12000"/>
+              </a:srgbClr>
+            </a:outerShdw>
+          </a:effectLst>
+        </p:spPr>
+      </p:sp>
+      <p:sp>
+        <p:nvSpPr>
+          <p:cNvPr id="6" name="Text 3"/>
+          <p:cNvSpPr/>
+          <p:nvPr/>
+        </p:nvSpPr>
+        <p:spPr>
+          <a:xfrm>
+            <a:off x="731520" y="1435608"/>
+            <a:ext cx="7680960" cy="987552"/>
+          </a:xfrm>
+          <a:prstGeom prst="rect">
+            <a:avLst/>
+          </a:prstGeom>
+          <a:noFill/>
+          <a:ln/>
+        </p:spPr>
+        <p:txBody>
+          <a:bodyPr wrap="square" lIns="0" tIns="0" rIns="0" bIns="0" rtlCol="0" anchor="t">
+            <a:normAutofit/>
+          </a:bodyPr>
+          <a:lstStyle/>
+          <a:p>
+            <a:pPr marL="342900" indent="-342900">
+              <a:spcAft>
+                <a:spcPts val="600"/>
+              </a:spcAft>
+              <a:buSzPct val="100000"/>
+              <a:buChar char="•"/>
+            </a:pPr>
+            <a:r>
+              <a:rPr lang="en-US" sz="1400" dirty="0">
+                <a:solidFill>
+                  <a:srgbClr val="1F2937"/>
+                </a:solidFill>
+                <a:latin typeface="Calibri" pitchFamily="34" charset="0"/>
+                <a:ea typeface="Calibri" pitchFamily="34" charset="-122"/>
+                <a:cs typeface="Calibri" pitchFamily="34" charset="-120"/>
+              </a:rPr>
+              <a:t>BOLA/IDOR is the dominant API bug — check ownership</a:t>
+            </a:r>
+            <a:endParaRPr lang="en-US" sz="1400" dirty="0"/>
+          </a:p>
+          <a:p>
+            <a:pPr marL="342900" indent="-342900">
+              <a:spcAft>
+                <a:spcPts val="600"/>
+              </a:spcAft>
+              <a:buSzPct val="100000"/>
+              <a:buChar char="•"/>
+            </a:pPr>
+            <a:r>
+              <a:rPr lang="en-US" sz="1400" dirty="0">
+                <a:solidFill>
+                  <a:srgbClr val="1F2937"/>
+                </a:solidFill>
+                <a:latin typeface="Calibri" pitchFamily="34" charset="0"/>
+                <a:ea typeface="Calibri" pitchFamily="34" charset="-122"/>
+                <a:cs typeface="Calibri" pitchFamily="34" charset="-120"/>
+              </a:rPr>
+              <a:t>Bind only fields you intend</a:t>
+            </a:r>
+            <a:endParaRPr lang="en-US" sz="1400" dirty="0"/>
+          </a:p>
+          <a:p>
+            <a:pPr marL="342900" indent="-342900">
+              <a:spcAft>
+                <a:spcPts val="600"/>
+              </a:spcAft>
+              <a:buSzPct val="100000"/>
+              <a:buChar char="•"/>
+            </a:pPr>
+            <a:r>
+              <a:rPr lang="en-US" sz="1400" dirty="0">
+                <a:solidFill>
+                  <a:srgbClr val="1F2937"/>
+                </a:solidFill>
+                <a:latin typeface="Calibri" pitchFamily="34" charset="0"/>
+                <a:ea typeface="Calibri" pitchFamily="34" charset="-122"/>
+                <a:cs typeface="Calibri" pitchFamily="34" charset="-120"/>
+              </a:rPr>
+              <a:t>Validate and throttle everything</a:t>
+            </a:r>
+            <a:endParaRPr lang="en-US" sz="1400" dirty="0"/>
+          </a:p>
+        </p:txBody>
+      </p:sp>
+      <p:sp>
+        <p:nvSpPr>
+          <p:cNvPr id="7" name="Text 4"/>
+          <p:cNvSpPr/>
+          <p:nvPr/>
+        </p:nvSpPr>
+        <p:spPr>
+          <a:xfrm>
+            <a:off x="457200" y="4800600"/>
+            <a:ext cx="6949440" cy="274320"/>
+          </a:xfrm>
+          <a:prstGeom prst="rect">
+            <a:avLst/>
+          </a:prstGeom>
+          <a:noFill/>
+          <a:ln/>
+        </p:spPr>
+        <p:txBody>
+          <a:bodyPr wrap="square" lIns="0" tIns="0" rIns="0" bIns="0" rtlCol="0" anchor="ctr"/>
+          <a:lstStyle/>
+          <a:p>
+            <a:pPr indent="0" marL="0">
+              <a:buNone/>
+            </a:pPr>
+            <a:r>
+              <a:rPr lang="en-US" sz="900" dirty="0">
+                <a:solidFill>
+                  <a:srgbClr val="64748B"/>
+                </a:solidFill>
+                <a:latin typeface="Calibri" pitchFamily="34" charset="0"/>
+                <a:ea typeface="Calibri" pitchFamily="34" charset="-122"/>
+                <a:cs typeface="Calibri" pitchFamily="34" charset="-120"/>
+              </a:rPr>
+              <a:t>Software Security · Week 10</a:t>
+            </a:r>
+            <a:endParaRPr lang="en-US" sz="900" dirty="0"/>
+          </a:p>
+        </p:txBody>
+      </p:sp>
+      <p:pic>
+        <p:nvPicPr>
+          <p:cNvPr id="8" name="Image 1" descr="/Users/pop7/Library/CloudStorage/OneDrive-MonsterConnectCo.,Ltd/Lecture/KOSEN69 - software-security/slides/pptx/assets/logo-small.png">    </p:cNvPr>
+          <p:cNvPicPr>
+            <a:picLocks noChangeAspect="1"/>
+          </p:cNvPicPr>
+          <p:nvPr/>
+        </p:nvPicPr>
+        <p:blipFill>
+          <a:blip r:embed="rId2"/>
+          <a:stretch>
+            <a:fillRect/>
+          </a:stretch>
+        </p:blipFill>
+        <p:spPr>
+          <a:xfrm>
+            <a:off x="7882128" y="4700016"/>
+            <a:ext cx="768096" cy="356616"/>
+          </a:xfrm>
+          <a:prstGeom prst="rect">
+            <a:avLst/>
+          </a:prstGeom>
+        </p:spPr>
+      </p:pic>
+    </p:spTree>
+  </p:cSld>
+  <p:clrMapOvr>
+    <a:masterClrMapping/>
+  </p:clrMapOvr>
+</p:sld>
+</file>
+
+<file path=ppt/slides/slide15.xml><?xml version="1.0" encoding="utf-8"?>
+<p:sld xmlns:a="http://schemas.openxmlformats.org/drawingml/2006/main" xmlns:r="http://schemas.openxmlformats.org/officeDocument/2006/relationships" xmlns:p="http://schemas.openxmlformats.org/presentationml/2006/main">
+  <p:cSld name="Slide 15">
+    <p:bg>
+      <p:bgPr>
+        <a:solidFill>
+          <a:srgbClr val="FFFFFF"/>
+        </a:solidFill>
+      </p:bgPr>
+    </p:bg>
+    <p:spTree>
+      <p:nvGrpSpPr>
+        <p:cNvPr id="1" name=""/>
+        <p:cNvGrpSpPr/>
+        <p:nvPr/>
+      </p:nvGrpSpPr>
+      <p:grpSpPr>
+        <a:xfrm>
+          <a:off x="0" y="0"/>
+          <a:ext cx="0" cy="0"/>
+          <a:chOff x="0" y="0"/>
+          <a:chExt cx="0" cy="0"/>
+        </a:xfrm>
+      </p:grpSpPr>
+      <p:sp>
+        <p:nvSpPr>
           <p:cNvPr id="2" name="Text 0"/>
           <p:cNvSpPr/>
           <p:nvPr/>
@@ -4204,7 +4519,9 @@
           <a:ln/>
         </p:spPr>
         <p:txBody>
-          <a:bodyPr wrap="square" lIns="0" tIns="0" rIns="0" bIns="0" rtlCol="0" anchor="t"/>
+          <a:bodyPr wrap="square" lIns="0" tIns="0" rIns="0" bIns="0" rtlCol="0" anchor="t">
+            <a:normAutofit/>
+          </a:bodyPr>
           <a:lstStyle/>
           <a:p>
             <a:pPr marL="342900" indent="-342900">
@@ -4545,7 +4862,9 @@
           <a:ln/>
         </p:spPr>
         <p:txBody>
-          <a:bodyPr wrap="square" lIns="0" tIns="0" rIns="0" bIns="0" rtlCol="0" anchor="t"/>
+          <a:bodyPr wrap="square" lIns="0" tIns="0" rIns="0" bIns="0" rtlCol="0" anchor="t">
+            <a:normAutofit/>
+          </a:bodyPr>
           <a:lstStyle/>
           <a:p>
             <a:pPr marL="342900" indent="-342900">
@@ -4823,7 +5142,9 @@
           <a:ln/>
         </p:spPr>
         <p:txBody>
-          <a:bodyPr wrap="square" lIns="0" tIns="0" rIns="0" bIns="0" rtlCol="0" anchor="t"/>
+          <a:bodyPr wrap="square" lIns="0" tIns="0" rIns="0" bIns="0" rtlCol="0" anchor="t">
+            <a:normAutofit/>
+          </a:bodyPr>
           <a:lstStyle/>
           <a:p>
             <a:pPr marL="342900" indent="-342900">
@@ -4905,7 +5226,7 @@
                 <a:ea typeface="Calibri" pitchFamily="34" charset="-122"/>
                 <a:cs typeface="Calibri" pitchFamily="34" charset="-120"/>
               </a:rPr>
-              <a:t>Maps to the OWASP API Security Top 10</a:t>
+              <a:t>Maps to the OWASP API Security Top 10:2023 (still current — no 2025 revision)</a:t>
             </a:r>
             <a:endParaRPr lang="en-US" sz="1400" dirty="0"/>
           </a:p>
@@ -5105,11 +5426,11 @@
         <p:spPr>
           <a:xfrm>
             <a:off x="457200" y="1325880"/>
-            <a:ext cx="8229600" cy="786384"/>
+            <a:ext cx="8229600" cy="493776"/>
           </a:xfrm>
           <a:prstGeom prst="roundRect">
             <a:avLst>
-              <a:gd name="adj" fmla="val 6977"/>
+              <a:gd name="adj" fmla="val 11111"/>
             </a:avLst>
           </a:prstGeom>
           <a:solidFill>
@@ -5132,7 +5453,7 @@
         <p:spPr>
           <a:xfrm>
             <a:off x="640080" y="1399032"/>
-            <a:ext cx="7863840" cy="640080"/>
+            <a:ext cx="7863840" cy="347472"/>
           </a:xfrm>
           <a:prstGeom prst="rect">
             <a:avLst/>
@@ -5141,7 +5462,9 @@
           <a:ln/>
         </p:spPr>
         <p:txBody>
-          <a:bodyPr wrap="square" lIns="0" tIns="0" rIns="0" bIns="0" rtlCol="0" anchor="t"/>
+          <a:bodyPr wrap="square" lIns="0" tIns="0" rIns="0" bIns="0" rtlCol="0" anchor="t">
+            <a:normAutofit/>
+          </a:bodyPr>
           <a:lstStyle/>
           <a:p>
             <a:pPr indent="0" marL="0">
@@ -5156,27 +5479,10 @@
                 <a:ea typeface="Courier New" pitchFamily="34" charset="-122"/>
                 <a:cs typeface="Courier New" pitchFamily="34" charset="-120"/>
               </a:rPr>
-              <a:t>GET /api/vehicle/1001/location   → yours</a:t>
+              <a:t>GET /api/users/2/orders   → bob's orders — while authenticated as alice</a:t>
             </a:r>
             <a:endParaRPr lang="en-US" sz="1150" dirty="0"/>
           </a:p>
-          <a:p>
-            <a:pPr indent="0" marL="0">
-              <a:buNone/>
-            </a:pPr>
-            <a:r>
-              <a:rPr lang="en-US" sz="1150" dirty="0">
-                <a:solidFill>
-                  <a:srgbClr val="9FE7D6"/>
-                </a:solidFill>
-                <a:latin typeface="Courier New" pitchFamily="34" charset="0"/>
-                <a:ea typeface="Courier New" pitchFamily="34" charset="-122"/>
-                <a:cs typeface="Courier New" pitchFamily="34" charset="-120"/>
-              </a:rPr>
-              <a:t>GET /api/vehicle/1002/location   → someone else's</a:t>
-            </a:r>
-            <a:endParaRPr lang="en-US" sz="1150" dirty="0"/>
-          </a:p>
         </p:txBody>
       </p:sp>
       <p:sp>
@@ -5187,12 +5493,12 @@
         </p:nvSpPr>
         <p:spPr>
           <a:xfrm>
-            <a:off x="457200" y="2276856"/>
-            <a:ext cx="8229600" cy="896112"/>
+            <a:off x="457200" y="1984248"/>
+            <a:ext cx="8229600" cy="1499616"/>
           </a:xfrm>
           <a:prstGeom prst="roundRect">
             <a:avLst>
-              <a:gd name="adj" fmla="val 8163"/>
+              <a:gd name="adj" fmla="val 4878"/>
             </a:avLst>
           </a:prstGeom>
           <a:solidFill>
@@ -5216,8 +5522,8 @@
         </p:nvSpPr>
         <p:spPr>
           <a:xfrm>
-            <a:off x="731520" y="2386584"/>
-            <a:ext cx="7680960" cy="676656"/>
+            <a:off x="731520" y="2093976"/>
+            <a:ext cx="7680960" cy="1280160"/>
           </a:xfrm>
           <a:prstGeom prst="rect">
             <a:avLst/>
@@ -5226,7 +5532,9 @@
           <a:ln/>
         </p:spPr>
         <p:txBody>
-          <a:bodyPr wrap="square" lIns="0" tIns="0" rIns="0" bIns="0" rtlCol="0" anchor="t"/>
+          <a:bodyPr wrap="square" lIns="0" tIns="0" rIns="0" bIns="0" rtlCol="0" anchor="t">
+            <a:normAutofit/>
+          </a:bodyPr>
           <a:lstStyle/>
           <a:p>
             <a:pPr marL="342900" indent="-342900">
@@ -5245,7 +5553,7 @@
                 <a:ea typeface="Calibri" pitchFamily="34" charset="-122"/>
                 <a:cs typeface="Calibri" pitchFamily="34" charset="-120"/>
               </a:rPr>
-              <a:t>Broken Object Level Authorization</a:t>
+              <a:t>Broken Object Level Authorization = IDOR, at API scale</a:t>
             </a:r>
             <a:endParaRPr lang="en-US" sz="1400" dirty="0"/>
           </a:p>
@@ -5266,7 +5574,7 @@
                 <a:ea typeface="Calibri" pitchFamily="34" charset="-122"/>
                 <a:cs typeface="Calibri" pitchFamily="34" charset="-120"/>
               </a:rPr>
-              <a:t>= IDOR, at API scale</a:t>
+              <a:t>The catch: the vulnerable endpoint doesn't check ownership at all — it hands back whatever &lt;id&gt;'s orders you ask for, full stop. There's no spoofable-but-present check to defeat; there's no check. (The X-User-Id header exists as this lab's stand-in for "auth," but on this route the code never even reads it.)</a:t>
             </a:r>
             <a:endParaRPr lang="en-US" sz="1400" dirty="0"/>
           </a:p>
@@ -5466,11 +5774,11 @@
         <p:spPr>
           <a:xfrm>
             <a:off x="457200" y="1325880"/>
-            <a:ext cx="8229600" cy="530352"/>
+            <a:ext cx="8229600" cy="493776"/>
           </a:xfrm>
           <a:prstGeom prst="roundRect">
             <a:avLst>
-              <a:gd name="adj" fmla="val 10345"/>
+              <a:gd name="adj" fmla="val 11111"/>
             </a:avLst>
           </a:prstGeom>
           <a:solidFill>
@@ -5493,7 +5801,7 @@
         <p:spPr>
           <a:xfrm>
             <a:off x="640080" y="1399032"/>
-            <a:ext cx="7863840" cy="384048"/>
+            <a:ext cx="7863840" cy="347472"/>
           </a:xfrm>
           <a:prstGeom prst="rect">
             <a:avLst/>
@@ -5502,7 +5810,9 @@
           <a:ln/>
         </p:spPr>
         <p:txBody>
-          <a:bodyPr wrap="square" lIns="0" tIns="0" rIns="0" bIns="0" rtlCol="0" anchor="t"/>
+          <a:bodyPr wrap="square" lIns="0" tIns="0" rIns="0" bIns="0" rtlCol="0" anchor="t">
+            <a:normAutofit/>
+          </a:bodyPr>
           <a:lstStyle/>
           <a:p>
             <a:pPr indent="0" marL="0">
@@ -5517,7 +5827,7 @@
                 <a:ea typeface="Courier New" pitchFamily="34" charset="-122"/>
                 <a:cs typeface="Courier New" pitchFamily="34" charset="-120"/>
               </a:rPr>
-              <a:t>POST /api/user  { "name":"x", "role":"admin", "credit":9999 }</a:t>
+              <a:t>POST /api/users  { "username":"x", "password":"y", "is_admin":true, "balance":9999 }</a:t>
             </a:r>
             <a:endParaRPr lang="en-US" sz="1150" dirty="0"/>
           </a:p>
@@ -5531,7 +5841,7 @@
         </p:nvSpPr>
         <p:spPr>
           <a:xfrm>
-            <a:off x="457200" y="2020824"/>
+            <a:off x="457200" y="1984248"/>
             <a:ext cx="8229600" cy="896112"/>
           </a:xfrm>
           <a:prstGeom prst="roundRect">
@@ -5560,7 +5870,7 @@
         </p:nvSpPr>
         <p:spPr>
           <a:xfrm>
-            <a:off x="731520" y="2130552"/>
+            <a:off x="731520" y="2093976"/>
             <a:ext cx="7680960" cy="676656"/>
           </a:xfrm>
           <a:prstGeom prst="rect">
@@ -5570,7 +5880,9 @@
           <a:ln/>
         </p:spPr>
         <p:txBody>
-          <a:bodyPr wrap="square" lIns="0" tIns="0" rIns="0" bIns="0" rtlCol="0" anchor="t"/>
+          <a:bodyPr wrap="square" lIns="0" tIns="0" rIns="0" bIns="0" rtlCol="0" anchor="t">
+            <a:normAutofit/>
+          </a:bodyPr>
           <a:lstStyle/>
           <a:p>
             <a:pPr marL="342900" indent="-342900">
@@ -5589,7 +5901,7 @@
                 <a:ea typeface="Calibri" pitchFamily="34" charset="-122"/>
                 <a:cs typeface="Calibri" pitchFamily="34" charset="-120"/>
               </a:rPr>
-              <a:t>Client sets fields the server blindly binds</a:t>
+              <a:t>Client sets fields the server blindly binds (user.update(body) — no allow-list)</a:t>
             </a:r>
             <a:endParaRPr lang="en-US" sz="1400" dirty="0"/>
           </a:p>
@@ -5610,7 +5922,7 @@
                 <a:ea typeface="Calibri" pitchFamily="34" charset="-122"/>
                 <a:cs typeface="Calibri" pitchFamily="34" charset="-120"/>
               </a:rPr>
-              <a:t>Privilege/credit escalation</a:t>
+              <a:t>Privilege/balance escalation, right at account creation</a:t>
             </a:r>
             <a:endParaRPr lang="en-US" sz="1400" dirty="0"/>
           </a:p>
@@ -5810,11 +6122,11 @@
         <p:spPr>
           <a:xfrm>
             <a:off x="457200" y="1325880"/>
-            <a:ext cx="8229600" cy="1517904"/>
+            <a:ext cx="8229600" cy="2322576"/>
           </a:xfrm>
           <a:prstGeom prst="roundRect">
             <a:avLst>
-              <a:gd name="adj" fmla="val 4819"/>
+              <a:gd name="adj" fmla="val 3150"/>
             </a:avLst>
           </a:prstGeom>
           <a:solidFill>
@@ -5839,7 +6151,7 @@
         <p:spPr>
           <a:xfrm>
             <a:off x="731520" y="1435608"/>
-            <a:ext cx="7680960" cy="1298448"/>
+            <a:ext cx="7680960" cy="2103120"/>
           </a:xfrm>
           <a:prstGeom prst="rect">
             <a:avLst/>
@@ -5848,7 +6160,9 @@
           <a:ln/>
         </p:spPr>
         <p:txBody>
-          <a:bodyPr wrap="square" lIns="0" tIns="0" rIns="0" bIns="0" rtlCol="0" anchor="t"/>
+          <a:bodyPr wrap="square" lIns="0" tIns="0" rIns="0" bIns="0" rtlCol="0" anchor="t">
+            <a:normAutofit/>
+          </a:bodyPr>
           <a:lstStyle/>
           <a:p>
             <a:pPr marL="342900" indent="-342900">
@@ -5867,7 +6181,7 @@
                 <a:ea typeface="Calibri" pitchFamily="34" charset="-122"/>
                 <a:cs typeface="Calibri" pitchFamily="34" charset="-120"/>
               </a:rPr>
-              <a:t>API2 — broken authentication</a:t>
+              <a:t>API2 — broken authentication (this week's X-User-Id header trick is a live example)</a:t>
             </a:r>
             <a:endParaRPr lang="en-US" sz="1400" dirty="0"/>
           </a:p>
@@ -5888,7 +6202,7 @@
                 <a:ea typeface="Calibri" pitchFamily="34" charset="-122"/>
                 <a:cs typeface="Calibri" pitchFamily="34" charset="-120"/>
               </a:rPr>
-              <a:t>API4 — unrestricted resource consumption (no rate limit)</a:t>
+              <a:t>API4 — unrestricted resource consumption: no rate limit on /api/login → today's third graded bug (5 failed attempts, then 429)</a:t>
             </a:r>
             <a:endParaRPr lang="en-US" sz="1400" dirty="0"/>
           </a:p>
@@ -5930,7 +6244,7 @@
                 <a:ea typeface="Calibri" pitchFamily="34" charset="-122"/>
                 <a:cs typeface="Calibri" pitchFamily="34" charset="-120"/>
               </a:rPr>
-              <a:t>Excessive data exposure (over-returning fields)</a:t>
+              <a:t>Under 2023's taxonomy, "excessive data exposure" isn't its own number — it's folded into API3 BOPLA alongside mass assignment (you may see it listed separately elsewhere, incl. crAPI's own docs — that's the older 2019 split)</a:t>
             </a:r>
             <a:endParaRPr lang="en-US" sz="1400" dirty="0"/>
           </a:p>
@@ -6168,7 +6482,9 @@
           <a:ln/>
         </p:spPr>
         <p:txBody>
-          <a:bodyPr wrap="square" lIns="0" tIns="0" rIns="0" bIns="0" rtlCol="0" anchor="t"/>
+          <a:bodyPr wrap="square" lIns="0" tIns="0" rIns="0" bIns="0" rtlCol="0" anchor="t">
+            <a:normAutofit/>
+          </a:bodyPr>
           <a:lstStyle/>
           <a:p>
             <a:pPr marL="342900" indent="-342900">
@@ -6480,7 +6796,9 @@
           <a:ln/>
         </p:spPr>
         <p:txBody>
-          <a:bodyPr wrap="square" lIns="0" tIns="0" rIns="0" bIns="0" rtlCol="0" anchor="t"/>
+          <a:bodyPr wrap="square" lIns="0" tIns="0" rIns="0" bIns="0" rtlCol="0" anchor="t">
+            <a:normAutofit/>
+          </a:bodyPr>
           <a:lstStyle/>
           <a:p>
             <a:pPr indent="0" marL="0">
@@ -6510,11 +6828,11 @@
         <p:spPr>
           <a:xfrm>
             <a:off x="457200" y="1965960"/>
-            <a:ext cx="8229600" cy="1810512"/>
+            <a:ext cx="8229600" cy="1591056"/>
           </a:xfrm>
           <a:prstGeom prst="roundRect">
             <a:avLst>
-              <a:gd name="adj" fmla="val 3030"/>
+              <a:gd name="adj" fmla="val 3448"/>
             </a:avLst>
           </a:prstGeom>
           <a:solidFill>
@@ -6537,7 +6855,7 @@
         <p:spPr>
           <a:xfrm>
             <a:off x="640080" y="2039112"/>
-            <a:ext cx="7863840" cy="1664208"/>
+            <a:ext cx="7863840" cy="1444752"/>
           </a:xfrm>
           <a:prstGeom prst="rect">
             <a:avLst/>
@@ -6546,7 +6864,9 @@
           <a:ln/>
         </p:spPr>
         <p:txBody>
-          <a:bodyPr wrap="square" lIns="0" tIns="0" rIns="0" bIns="0" rtlCol="0" anchor="t"/>
+          <a:bodyPr wrap="square" lIns="0" tIns="0" rIns="0" bIns="0" rtlCol="0" anchor="t">
+            <a:normAutofit/>
+          </a:bodyPr>
           <a:lstStyle/>
           <a:p>
             <a:pPr indent="0" marL="0">
@@ -6660,8 +6980,8 @@
         </p:nvSpPr>
         <p:spPr>
           <a:xfrm>
-            <a:off x="457200" y="4800600"/>
-            <a:ext cx="6949440" cy="274320"/>
+            <a:off x="548640" y="3721608"/>
+            <a:ext cx="8046720" cy="822960"/>
           </a:xfrm>
           <a:prstGeom prst="rect">
             <a:avLst/>
@@ -6670,21 +6990,62 @@
           <a:ln/>
         </p:spPr>
         <p:txBody>
-          <a:bodyPr wrap="square" lIns="0" tIns="0" rIns="0" bIns="0" rtlCol="0" anchor="ctr"/>
+          <a:bodyPr wrap="square" lIns="0" tIns="0" rIns="0" bIns="0" rtlCol="0" anchor="t">
+            <a:normAutofit/>
+          </a:bodyPr>
           <a:lstStyle/>
           <a:p>
             <a:pPr indent="0" marL="0">
               <a:buNone/>
             </a:pPr>
             <a:r>
-              <a:rPr lang="en-US" sz="900" dirty="0">
-                <a:solidFill>
-                  <a:srgbClr val="64748B"/>
+              <a:rPr lang="en-US" sz="1400" dirty="0">
+                <a:solidFill>
+                  <a:srgbClr val="1F2937"/>
                 </a:solidFill>
                 <a:latin typeface="Calibri" pitchFamily="34" charset="0"/>
                 <a:ea typeface="Calibri" pitchFamily="34" charset="-122"/>
                 <a:cs typeface="Calibri" pitchFamily="34" charset="-120"/>
               </a:rPr>
+              <a:t>General awareness — no worksheet task uses these against today's target; useful for the CTF weeks later in the term.</a:t>
+            </a:r>
+            <a:endParaRPr lang="en-US" sz="1400" dirty="0"/>
+          </a:p>
+        </p:txBody>
+      </p:sp>
+      <p:sp>
+        <p:nvSpPr>
+          <p:cNvPr id="9" name="Text 6"/>
+          <p:cNvSpPr/>
+          <p:nvPr/>
+        </p:nvSpPr>
+        <p:spPr>
+          <a:xfrm>
+            <a:off x="457200" y="4800600"/>
+            <a:ext cx="6949440" cy="274320"/>
+          </a:xfrm>
+          <a:prstGeom prst="rect">
+            <a:avLst/>
+          </a:prstGeom>
+          <a:noFill/>
+          <a:ln/>
+        </p:spPr>
+        <p:txBody>
+          <a:bodyPr wrap="square" lIns="0" tIns="0" rIns="0" bIns="0" rtlCol="0" anchor="ctr"/>
+          <a:lstStyle/>
+          <a:p>
+            <a:pPr indent="0" marL="0">
+              <a:buNone/>
+            </a:pPr>
+            <a:r>
+              <a:rPr lang="en-US" sz="900" dirty="0">
+                <a:solidFill>
+                  <a:srgbClr val="64748B"/>
+                </a:solidFill>
+                <a:latin typeface="Calibri" pitchFamily="34" charset="0"/>
+                <a:ea typeface="Calibri" pitchFamily="34" charset="-122"/>
+                <a:cs typeface="Calibri" pitchFamily="34" charset="-120"/>
+              </a:rPr>
               <a:t>Software Security · Week 10</a:t>
             </a:r>
             <a:endParaRPr lang="en-US" sz="900" dirty="0"/>
@@ -6693,7 +7054,7 @@
       </p:sp>
       <p:pic>
         <p:nvPicPr>
-          <p:cNvPr id="9" name="Image 1" descr="/Users/pop7/Library/CloudStorage/OneDrive-MonsterConnectCo.,Ltd/Lecture/KOSEN69 - software-security/slides/pptx/assets/logo-small.png">    </p:cNvPr>
+          <p:cNvPr id="10" name="Image 1" descr="/Users/pop7/Library/CloudStorage/OneDrive-MonsterConnectCo.,Ltd/Lecture/KOSEN69 - software-security/slides/pptx/assets/logo-small.png">    </p:cNvPr>
           <p:cNvPicPr>
             <a:picLocks noChangeAspect="1"/>
           </p:cNvPicPr>

--- a/slides/pptx/week10.pptx
+++ b/slides/pptx/week10.pptx
@@ -20,9 +20,10 @@
     <p:sldId id="268" r:id="rId14"/>
     <p:sldId id="269" r:id="rId15"/>
     <p:sldId id="270" r:id="rId16"/>
+    <p:sldId id="271" r:id="rId17"/>
   </p:sldIdLst>
   <p:notesMasterIdLst>
-    <p:notesMasterId r:id="rId17"/>
+    <p:notesMasterId r:id="rId18"/>
   </p:notesMasterIdLst>
   <p:sldSz cx="9144000" cy="5143500"/>
   <p:notesSz cx="5143500" cy="9144000"/>
@@ -692,7 +693,7 @@
           <a:p>
             <a:r>
               <a:rPr lang="en-US" dirty="0"/>
-              <a:t>Explain before lab: the local app IS the graded lab — 65 of 100 points, all four tasks above. crAPI is a genuinely fun bonus with zero grading weight and no fix/patch step — don't imply "Round 2" fixes crAPI, nothing does. Defend (task 4) is read-and-cite against a pre-written solution, not student-authored code. Q6 of the quiz asks for the mass-assignment field + fix + personal flag from the LOCAL target. ~3 min.</a:t>
+              <a:t>Synthesis slide — today's three graded bugs, each traced to its exact line and exact fix. Land on the closing line: nothing here is a malformed-input problem, which is why "sanitize your inputs" doesn't apply this week — these are missing checks, not bad parsing. ~4 min.</a:t>
             </a:r>
             <a:endParaRPr lang="en-US" dirty="0"/>
           </a:p>
@@ -868,7 +869,7 @@
           <a:p>
             <a:r>
               <a:rPr lang="en-US" dirty="0"/>
-              <a:t>Before/after + API-Top-10 mapping. AI-resilient tasks count. Also the NoteVault project API task. Both flags come from the local target — remind students crAPI capture isn't part of the deliverable.</a:t>
+              <a:t>Explain before lab: the local app IS the graded lab — 65 of 100 points, all four tasks above. crAPI is a genuinely fun bonus with zero grading weight and no fix/patch step — don't imply "Round 2" fixes crAPI, nothing does. Defend (task 4) is read-and-cite against a pre-written solution, not student-authored code. Q6 of the quiz asks for the mass-assignment field + fix + personal flag from the LOCAL target. ~3 min.</a:t>
             </a:r>
             <a:endParaRPr lang="en-US" dirty="0"/>
           </a:p>
@@ -956,7 +957,7 @@
           <a:p>
             <a:r>
               <a:rPr lang="en-US" dirty="0"/>
-              <a:t>Recap. Cold-call: "what one check stops BOLA?" (per-object ownership authorization). ~2 min.</a:t>
+              <a:t>Before/after + API-Top-10 mapping. AI-resilient tasks count. Also the NoteVault project API task. Both flags come from the local target — remind students crAPI capture isn't part of the deliverable.</a:t>
             </a:r>
             <a:endParaRPr lang="en-US" dirty="0"/>
           </a:p>
@@ -1044,7 +1045,7 @@
           <a:p>
             <a:r>
               <a:rPr lang="en-US" dirty="0"/>
-              <a:t>Cliffhanger: "Next week we leave the web — crash a C binary with a fuzzer and hijack its execution, then rewrite it in Rust." Remind crAPI pulled before next session.</a:t>
+              <a:t>Recap. Cold-call: "what one check stops BOLA?" (per-object ownership authorization). ~2 min.</a:t>
             </a:r>
             <a:endParaRPr lang="en-US" dirty="0"/>
           </a:p>
@@ -1068,6 +1069,94 @@
             <a:fld id="{F7021451-1387-4CA6-816F-3879F97B5CBC}" type="slidenum">
               <a:rPr lang="en-US"/>
               <a:t>15</a:t>
+            </a:fld>
+            <a:endParaRPr lang="en-US"/>
+          </a:p>
+        </p:txBody>
+      </p:sp>
+    </p:spTree>
+    <p:extLst>
+      <p:ext uri="{BB962C8B-B14F-4D97-AF65-F5344CB8AC3E}">
+        <p14:creationId xmlns:p14="http://schemas.microsoft.com/office/powerpoint/2010/main" val="1024086991"/>
+      </p:ext>
+    </p:extLst>
+  </p:cSld>
+  <p:clrMapOvr>
+    <a:masterClrMapping/>
+  </p:clrMapOvr>
+</p:notes>
+</file>
+
+<file path=ppt/notesSlides/notesSlide16.xml><?xml version="1.0" encoding="utf-8"?>
+<p:notes xmlns:a="http://schemas.openxmlformats.org/drawingml/2006/main" xmlns:r="http://schemas.openxmlformats.org/officeDocument/2006/relationships" xmlns:p="http://schemas.openxmlformats.org/presentationml/2006/main">
+  <p:cSld>
+    <p:spTree>
+      <p:nvGrpSpPr>
+        <p:cNvPr id="1" name=""/>
+        <p:cNvGrpSpPr/>
+        <p:nvPr/>
+      </p:nvGrpSpPr>
+      <p:grpSpPr>
+        <a:xfrm>
+          <a:off x="0" y="0"/>
+          <a:ext cx="0" cy="0"/>
+          <a:chOff x="0" y="0"/>
+          <a:chExt cx="0" cy="0"/>
+        </a:xfrm>
+      </p:grpSpPr>
+      <p:sp>
+        <p:nvSpPr>
+          <p:cNvPr id="2" name="Slide Image Placeholder 1"/>
+          <p:cNvSpPr>
+            <a:spLocks noGrp="1" noRot="1" noChangeAspect="1"/>
+          </p:cNvSpPr>
+          <p:nvPr>
+            <p:ph type="sldImg"/>
+          </p:nvPr>
+        </p:nvSpPr>
+        <p:spPr/>
+      </p:sp>
+      <p:sp>
+        <p:nvSpPr>
+          <p:cNvPr id="3" name="Notes Placeholder 2"/>
+          <p:cNvSpPr>
+            <a:spLocks noGrp="1"/>
+          </p:cNvSpPr>
+          <p:nvPr>
+            <p:ph type="body" idx="1"/>
+          </p:nvPr>
+        </p:nvSpPr>
+        <p:spPr/>
+        <p:txBody>
+          <a:bodyPr/>
+          <a:lstStyle/>
+          <a:p>
+            <a:r>
+              <a:rPr lang="en-US" dirty="0"/>
+              <a:t>Cliffhanger: "Next week we leave the web — crash a C binary with a fuzzer and hijack its execution, then rewrite it in Rust." Remind crAPI pulled before next session.</a:t>
+            </a:r>
+            <a:endParaRPr lang="en-US" dirty="0"/>
+          </a:p>
+        </p:txBody>
+      </p:sp>
+      <p:sp>
+        <p:nvSpPr>
+          <p:cNvPr id="4" name="Slide Number Placeholder 3"/>
+          <p:cNvSpPr>
+            <a:spLocks noGrp="1"/>
+          </p:cNvSpPr>
+          <p:nvPr>
+            <p:ph type="sldNum" sz="quarter" idx="10"/>
+          </p:nvPr>
+        </p:nvSpPr>
+        <p:spPr/>
+        <p:txBody>
+          <a:bodyPr/>
+          <a:lstStyle/>
+          <a:p>
+            <a:fld id="{F7021451-1387-4CA6-816F-3879F97B5CBC}" type="slidenum">
+              <a:rPr lang="en-US"/>
+              <a:t>16</a:t>
             </a:fld>
             <a:endParaRPr lang="en-US"/>
           </a:p>
@@ -1484,7 +1573,7 @@
           <a:p>
             <a:r>
               <a:rPr lang="en-US" dirty="0"/>
-              <a:t>Walk it: the server takes the whole JSON body and binds it to the model, including fields the UI never exposes (is_admin, balance). This is today's local target's mass-assignment bug and the weekly quiz Q6. Fix = allow-list the bindable fields (ALLOWED_CREATE_FIELDS in solution_api.py). ~5 min.</a:t>
+              <a:t>Walk it: the server takes the whole JSON body and binds it to the model, including fields the UI never exposes (is_admin, balance). The sim runs both create_user() implementations for real — edit the body, flip the toggle, watch which fields survive. This is today's local target's mass-assignment bug and the weekly quiz Q6. Fix = allow-list the bindable fields (ALLOWED_CREATE_FIELDS in solution_api.py). ~5 min.</a:t>
             </a:r>
             <a:endParaRPr lang="en-US" dirty="0"/>
           </a:p>
@@ -2772,7 +2861,7 @@
                 <a:ea typeface="Arial" pitchFamily="34" charset="-122"/>
                 <a:cs typeface="Arial" pitchFamily="34" charset="-120"/>
               </a:rPr>
-              <a:t>🥷 Today's raid — the graded target</a:t>
+              <a:t>One API, three flaws</a:t>
             </a:r>
             <a:endParaRPr lang="en-US" sz="2600" dirty="0"/>
           </a:p>
@@ -2787,7 +2876,7 @@
         <p:spPr>
           <a:xfrm>
             <a:off x="548640" y="1325880"/>
-            <a:ext cx="8046720" cy="548640"/>
+            <a:ext cx="8046720" cy="1920240"/>
           </a:xfrm>
           <a:prstGeom prst="rect">
             <a:avLst/>
@@ -2813,7 +2902,7 @@
                 <a:ea typeface="Calibri" pitchFamily="34" charset="-122"/>
                 <a:cs typeface="Calibri" pitchFamily="34" charset="-120"/>
               </a:rPr>
-              <a:t>Local API, docker compose up → :8080 (vulnerable) / :8081 (fixed):</a:t>
+              <a:t>See diagram: One REST API with three separate flaws, each in a different handler. GET /api/users/{id}/orders never compares owner to caller — API1 BOLA. POST /api/users splats the whole JSON body into the model — API3 mass assignment. POST /api/login has no counter or lockout — API4 unrestricted resource consumption. All three are authorization and design flaws, not input-validation flaws — the JSON is well formed, so no amount of escaping, encoding, or a WAF rule blocks any of them. (web only)</a:t>
             </a:r>
             <a:endParaRPr lang="en-US" sz="1400" dirty="0"/>
           </a:p>
@@ -2821,34 +2910,14 @@
       </p:sp>
       <p:sp>
         <p:nvSpPr>
-          <p:cNvPr id="6" name="Shape 3"/>
-          <p:cNvSpPr/>
-          <p:nvPr/>
-        </p:nvSpPr>
-        <p:spPr>
-          <a:xfrm>
-            <a:off x="502920" y="1965960"/>
-            <a:ext cx="384048" cy="384048"/>
-          </a:xfrm>
-          <a:prstGeom prst="ellipse">
-            <a:avLst/>
-          </a:prstGeom>
-          <a:solidFill>
-            <a:srgbClr val="E35205"/>
-          </a:solidFill>
-          <a:ln/>
-        </p:spPr>
-      </p:sp>
-      <p:sp>
-        <p:nvSpPr>
-          <p:cNvPr id="7" name="Text 4"/>
-          <p:cNvSpPr/>
-          <p:nvPr/>
-        </p:nvSpPr>
-        <p:spPr>
-          <a:xfrm>
-            <a:off x="502920" y="1965960"/>
-            <a:ext cx="384048" cy="384048"/>
+          <p:cNvPr id="6" name="Text 3"/>
+          <p:cNvSpPr/>
+          <p:nvPr/>
+        </p:nvSpPr>
+        <p:spPr>
+          <a:xfrm>
+            <a:off x="457200" y="4800600"/>
+            <a:ext cx="6949440" cy="274320"/>
           </a:xfrm>
           <a:prstGeom prst="rect">
             <a:avLst/>
@@ -2858,400 +2927,20 @@
         </p:spPr>
         <p:txBody>
           <a:bodyPr wrap="square" lIns="0" tIns="0" rIns="0" bIns="0" rtlCol="0" anchor="ctr"/>
-          <a:lstStyle/>
-          <a:p>
-            <a:pPr algn="ctr" indent="0" marL="0">
-              <a:buNone/>
-            </a:pPr>
-            <a:r>
-              <a:rPr lang="en-US" sz="1500" b="1" dirty="0">
-                <a:solidFill>
-                  <a:srgbClr val="0E1726"/>
-                </a:solidFill>
-                <a:latin typeface="Arial" pitchFamily="34" charset="0"/>
-                <a:ea typeface="Arial" pitchFamily="34" charset="-122"/>
-                <a:cs typeface="Arial" pitchFamily="34" charset="-120"/>
-              </a:rPr>
-              <a:t>1</a:t>
-            </a:r>
-            <a:endParaRPr lang="en-US" sz="1500" dirty="0"/>
-          </a:p>
-        </p:txBody>
-      </p:sp>
-      <p:sp>
-        <p:nvSpPr>
-          <p:cNvPr id="8" name="Text 5"/>
-          <p:cNvSpPr/>
-          <p:nvPr/>
-        </p:nvSpPr>
-        <p:spPr>
-          <a:xfrm>
-            <a:off x="1051560" y="1965960"/>
-            <a:ext cx="7589520" cy="658368"/>
-          </a:xfrm>
-          <a:prstGeom prst="rect">
-            <a:avLst/>
-          </a:prstGeom>
-          <a:noFill/>
-          <a:ln/>
-        </p:spPr>
-        <p:txBody>
-          <a:bodyPr wrap="square" lIns="0" tIns="0" rIns="0" bIns="0" rtlCol="0" anchor="ctr">
-            <a:normAutofit/>
-          </a:bodyPr>
           <a:lstStyle/>
           <a:p>
             <a:pPr indent="0" marL="0">
               <a:buNone/>
             </a:pPr>
             <a:r>
-              <a:rPr lang="en-US" sz="1350" dirty="0">
-                <a:solidFill>
-                  <a:srgbClr val="1F2937"/>
+              <a:rPr lang="en-US" sz="900" dirty="0">
+                <a:solidFill>
+                  <a:srgbClr val="64748B"/>
                 </a:solidFill>
                 <a:latin typeface="Calibri" pitchFamily="34" charset="0"/>
                 <a:ea typeface="Calibri" pitchFamily="34" charset="-122"/>
                 <a:cs typeface="Calibri" pitchFamily="34" charset="-120"/>
               </a:rPr>
-              <a:t>BOLA: 401 → 403 → 200 — probe, get denied, then read another user's orders as yourself</a:t>
-            </a:r>
-            <a:endParaRPr lang="en-US" sz="1350" dirty="0"/>
-          </a:p>
-        </p:txBody>
-      </p:sp>
-      <p:sp>
-        <p:nvSpPr>
-          <p:cNvPr id="9" name="Shape 6"/>
-          <p:cNvSpPr/>
-          <p:nvPr/>
-        </p:nvSpPr>
-        <p:spPr>
-          <a:xfrm>
-            <a:off x="502920" y="2697480"/>
-            <a:ext cx="384048" cy="384048"/>
-          </a:xfrm>
-          <a:prstGeom prst="ellipse">
-            <a:avLst/>
-          </a:prstGeom>
-          <a:solidFill>
-            <a:srgbClr val="E35205"/>
-          </a:solidFill>
-          <a:ln/>
-        </p:spPr>
-      </p:sp>
-      <p:sp>
-        <p:nvSpPr>
-          <p:cNvPr id="10" name="Text 7"/>
-          <p:cNvSpPr/>
-          <p:nvPr/>
-        </p:nvSpPr>
-        <p:spPr>
-          <a:xfrm>
-            <a:off x="502920" y="2697480"/>
-            <a:ext cx="384048" cy="384048"/>
-          </a:xfrm>
-          <a:prstGeom prst="rect">
-            <a:avLst/>
-          </a:prstGeom>
-          <a:noFill/>
-          <a:ln/>
-        </p:spPr>
-        <p:txBody>
-          <a:bodyPr wrap="square" lIns="0" tIns="0" rIns="0" bIns="0" rtlCol="0" anchor="ctr"/>
-          <a:lstStyle/>
-          <a:p>
-            <a:pPr algn="ctr" indent="0" marL="0">
-              <a:buNone/>
-            </a:pPr>
-            <a:r>
-              <a:rPr lang="en-US" sz="1500" b="1" dirty="0">
-                <a:solidFill>
-                  <a:srgbClr val="0E1726"/>
-                </a:solidFill>
-                <a:latin typeface="Arial" pitchFamily="34" charset="0"/>
-                <a:ea typeface="Arial" pitchFamily="34" charset="-122"/>
-                <a:cs typeface="Arial" pitchFamily="34" charset="-120"/>
-              </a:rPr>
-              <a:t>2</a:t>
-            </a:r>
-            <a:endParaRPr lang="en-US" sz="1500" dirty="0"/>
-          </a:p>
-        </p:txBody>
-      </p:sp>
-      <p:sp>
-        <p:nvSpPr>
-          <p:cNvPr id="11" name="Text 8"/>
-          <p:cNvSpPr/>
-          <p:nvPr/>
-        </p:nvSpPr>
-        <p:spPr>
-          <a:xfrm>
-            <a:off x="1051560" y="2697480"/>
-            <a:ext cx="7589520" cy="402336"/>
-          </a:xfrm>
-          <a:prstGeom prst="rect">
-            <a:avLst/>
-          </a:prstGeom>
-          <a:noFill/>
-          <a:ln/>
-        </p:spPr>
-        <p:txBody>
-          <a:bodyPr wrap="square" lIns="0" tIns="0" rIns="0" bIns="0" rtlCol="0" anchor="ctr">
-            <a:normAutofit/>
-          </a:bodyPr>
-          <a:lstStyle/>
-          <a:p>
-            <a:pPr indent="0" marL="0">
-              <a:buNone/>
-            </a:pPr>
-            <a:r>
-              <a:rPr lang="en-US" sz="1350" dirty="0">
-                <a:solidFill>
-                  <a:srgbClr val="1F2937"/>
-                </a:solidFill>
-                <a:latin typeface="Calibri" pitchFamily="34" charset="0"/>
-                <a:ea typeface="Calibri" pitchFamily="34" charset="-122"/>
-                <a:cs typeface="Calibri" pitchFamily="34" charset="-120"/>
-              </a:rPr>
-              <a:t>Mass assignment: smuggle is_admin/balance into account creation</a:t>
-            </a:r>
-            <a:endParaRPr lang="en-US" sz="1350" dirty="0"/>
-          </a:p>
-        </p:txBody>
-      </p:sp>
-      <p:sp>
-        <p:nvSpPr>
-          <p:cNvPr id="12" name="Shape 9"/>
-          <p:cNvSpPr/>
-          <p:nvPr/>
-        </p:nvSpPr>
-        <p:spPr>
-          <a:xfrm>
-            <a:off x="502920" y="3172968"/>
-            <a:ext cx="384048" cy="384048"/>
-          </a:xfrm>
-          <a:prstGeom prst="ellipse">
-            <a:avLst/>
-          </a:prstGeom>
-          <a:solidFill>
-            <a:srgbClr val="E35205"/>
-          </a:solidFill>
-          <a:ln/>
-        </p:spPr>
-      </p:sp>
-      <p:sp>
-        <p:nvSpPr>
-          <p:cNvPr id="13" name="Text 10"/>
-          <p:cNvSpPr/>
-          <p:nvPr/>
-        </p:nvSpPr>
-        <p:spPr>
-          <a:xfrm>
-            <a:off x="502920" y="3172968"/>
-            <a:ext cx="384048" cy="384048"/>
-          </a:xfrm>
-          <a:prstGeom prst="rect">
-            <a:avLst/>
-          </a:prstGeom>
-          <a:noFill/>
-          <a:ln/>
-        </p:spPr>
-        <p:txBody>
-          <a:bodyPr wrap="square" lIns="0" tIns="0" rIns="0" bIns="0" rtlCol="0" anchor="ctr"/>
-          <a:lstStyle/>
-          <a:p>
-            <a:pPr algn="ctr" indent="0" marL="0">
-              <a:buNone/>
-            </a:pPr>
-            <a:r>
-              <a:rPr lang="en-US" sz="1500" b="1" dirty="0">
-                <a:solidFill>
-                  <a:srgbClr val="0E1726"/>
-                </a:solidFill>
-                <a:latin typeface="Arial" pitchFamily="34" charset="0"/>
-                <a:ea typeface="Arial" pitchFamily="34" charset="-122"/>
-                <a:cs typeface="Arial" pitchFamily="34" charset="-120"/>
-              </a:rPr>
-              <a:t>3</a:t>
-            </a:r>
-            <a:endParaRPr lang="en-US" sz="1500" dirty="0"/>
-          </a:p>
-        </p:txBody>
-      </p:sp>
-      <p:sp>
-        <p:nvSpPr>
-          <p:cNvPr id="14" name="Text 11"/>
-          <p:cNvSpPr/>
-          <p:nvPr/>
-        </p:nvSpPr>
-        <p:spPr>
-          <a:xfrm>
-            <a:off x="1051560" y="3172968"/>
-            <a:ext cx="7589520" cy="402336"/>
-          </a:xfrm>
-          <a:prstGeom prst="rect">
-            <a:avLst/>
-          </a:prstGeom>
-          <a:noFill/>
-          <a:ln/>
-        </p:spPr>
-        <p:txBody>
-          <a:bodyPr wrap="square" lIns="0" tIns="0" rIns="0" bIns="0" rtlCol="0" anchor="ctr">
-            <a:normAutofit/>
-          </a:bodyPr>
-          <a:lstStyle/>
-          <a:p>
-            <a:pPr indent="0" marL="0">
-              <a:buNone/>
-            </a:pPr>
-            <a:r>
-              <a:rPr lang="en-US" sz="1350" dirty="0">
-                <a:solidFill>
-                  <a:srgbClr val="1F2937"/>
-                </a:solidFill>
-                <a:latin typeface="Calibri" pitchFamily="34" charset="0"/>
-                <a:ea typeface="Calibri" pitchFamily="34" charset="-122"/>
-                <a:cs typeface="Calibri" pitchFamily="34" charset="-120"/>
-              </a:rPr>
-              <a:t>Resource consumption: 401×5 → 429×2 on /api/login</a:t>
-            </a:r>
-            <a:endParaRPr lang="en-US" sz="1350" dirty="0"/>
-          </a:p>
-        </p:txBody>
-      </p:sp>
-      <p:sp>
-        <p:nvSpPr>
-          <p:cNvPr id="15" name="Shape 12"/>
-          <p:cNvSpPr/>
-          <p:nvPr/>
-        </p:nvSpPr>
-        <p:spPr>
-          <a:xfrm>
-            <a:off x="502920" y="3648456"/>
-            <a:ext cx="384048" cy="384048"/>
-          </a:xfrm>
-          <a:prstGeom prst="ellipse">
-            <a:avLst/>
-          </a:prstGeom>
-          <a:solidFill>
-            <a:srgbClr val="E35205"/>
-          </a:solidFill>
-          <a:ln/>
-        </p:spPr>
-      </p:sp>
-      <p:sp>
-        <p:nvSpPr>
-          <p:cNvPr id="16" name="Text 13"/>
-          <p:cNvSpPr/>
-          <p:nvPr/>
-        </p:nvSpPr>
-        <p:spPr>
-          <a:xfrm>
-            <a:off x="502920" y="3648456"/>
-            <a:ext cx="384048" cy="384048"/>
-          </a:xfrm>
-          <a:prstGeom prst="rect">
-            <a:avLst/>
-          </a:prstGeom>
-          <a:noFill/>
-          <a:ln/>
-        </p:spPr>
-        <p:txBody>
-          <a:bodyPr wrap="square" lIns="0" tIns="0" rIns="0" bIns="0" rtlCol="0" anchor="ctr"/>
-          <a:lstStyle/>
-          <a:p>
-            <a:pPr algn="ctr" indent="0" marL="0">
-              <a:buNone/>
-            </a:pPr>
-            <a:r>
-              <a:rPr lang="en-US" sz="1500" b="1" dirty="0">
-                <a:solidFill>
-                  <a:srgbClr val="0E1726"/>
-                </a:solidFill>
-                <a:latin typeface="Arial" pitchFamily="34" charset="0"/>
-                <a:ea typeface="Arial" pitchFamily="34" charset="-122"/>
-                <a:cs typeface="Arial" pitchFamily="34" charset="-120"/>
-              </a:rPr>
-              <a:t>4</a:t>
-            </a:r>
-            <a:endParaRPr lang="en-US" sz="1500" dirty="0"/>
-          </a:p>
-        </p:txBody>
-      </p:sp>
-      <p:sp>
-        <p:nvSpPr>
-          <p:cNvPr id="17" name="Text 14"/>
-          <p:cNvSpPr/>
-          <p:nvPr/>
-        </p:nvSpPr>
-        <p:spPr>
-          <a:xfrm>
-            <a:off x="1051560" y="3648456"/>
-            <a:ext cx="7589520" cy="402336"/>
-          </a:xfrm>
-          <a:prstGeom prst="rect">
-            <a:avLst/>
-          </a:prstGeom>
-          <a:noFill/>
-          <a:ln/>
-        </p:spPr>
-        <p:txBody>
-          <a:bodyPr wrap="square" lIns="0" tIns="0" rIns="0" bIns="0" rtlCol="0" anchor="ctr">
-            <a:normAutofit/>
-          </a:bodyPr>
-          <a:lstStyle/>
-          <a:p>
-            <a:pPr indent="0" marL="0">
-              <a:buNone/>
-            </a:pPr>
-            <a:r>
-              <a:rPr lang="en-US" sz="1350" dirty="0">
-                <a:solidFill>
-                  <a:srgbClr val="1F2937"/>
-                </a:solidFill>
-                <a:latin typeface="Calibri" pitchFamily="34" charset="0"/>
-                <a:ea typeface="Calibri" pitchFamily="34" charset="-122"/>
-                <a:cs typeface="Calibri" pitchFamily="34" charset="-120"/>
-              </a:rPr>
-              <a:t>Defend: switch to the pre-written solution_api.py, cite the exact fix line for each</a:t>
-            </a:r>
-            <a:endParaRPr lang="en-US" sz="1350" dirty="0"/>
-          </a:p>
-        </p:txBody>
-      </p:sp>
-      <p:sp>
-        <p:nvSpPr>
-          <p:cNvPr id="18" name="Text 15"/>
-          <p:cNvSpPr/>
-          <p:nvPr/>
-        </p:nvSpPr>
-        <p:spPr>
-          <a:xfrm>
-            <a:off x="457200" y="4800600"/>
-            <a:ext cx="6949440" cy="274320"/>
-          </a:xfrm>
-          <a:prstGeom prst="rect">
-            <a:avLst/>
-          </a:prstGeom>
-          <a:noFill/>
-          <a:ln/>
-        </p:spPr>
-        <p:txBody>
-          <a:bodyPr wrap="square" lIns="0" tIns="0" rIns="0" bIns="0" rtlCol="0" anchor="ctr"/>
-          <a:lstStyle/>
-          <a:p>
-            <a:pPr indent="0" marL="0">
-              <a:buNone/>
-            </a:pPr>
-            <a:r>
-              <a:rPr lang="en-US" sz="900" dirty="0">
-                <a:solidFill>
-                  <a:srgbClr val="64748B"/>
-                </a:solidFill>
-                <a:latin typeface="Calibri" pitchFamily="34" charset="0"/>
-                <a:ea typeface="Calibri" pitchFamily="34" charset="-122"/>
-                <a:cs typeface="Calibri" pitchFamily="34" charset="-120"/>
-              </a:rPr>
               <a:t>Software Security · Week 10</a:t>
             </a:r>
             <a:endParaRPr lang="en-US" sz="900" dirty="0"/>
@@ -3260,7 +2949,7 @@
       </p:sp>
       <p:pic>
         <p:nvPicPr>
-          <p:cNvPr id="19" name="Image 1" descr="/Users/pop7/Library/CloudStorage/OneDrive-MonsterConnectCo.,Ltd/Lecture/KOSEN69 - software-security/slides/pptx/assets/logo-small.png">    </p:cNvPr>
+          <p:cNvPr id="7" name="Image 1" descr="/Users/pop7/Library/CloudStorage/OneDrive-MonsterConnectCo.,Ltd/Lecture/KOSEN69 - software-security/slides/pptx/assets/logo-small.png">    </p:cNvPr>
           <p:cNvPicPr>
             <a:picLocks noChangeAspect="1"/>
           </p:cNvPicPr>
@@ -3398,7 +3087,7 @@
                 <a:ea typeface="Arial" pitchFamily="34" charset="-122"/>
                 <a:cs typeface="Arial" pitchFamily="34" charset="-120"/>
               </a:rPr>
-              <a:t>🥷 Today's raid — the graded target (cont.)</a:t>
+              <a:t>🥷 Today's raid — the graded target</a:t>
             </a:r>
             <a:endParaRPr lang="en-US" sz="2600" dirty="0"/>
           </a:p>
@@ -3406,36 +3095,114 @@
       </p:sp>
       <p:sp>
         <p:nvSpPr>
-          <p:cNvPr id="5" name="Shape 2"/>
-          <p:cNvSpPr/>
-          <p:nvPr/>
-        </p:nvSpPr>
-        <p:spPr>
-          <a:xfrm>
-            <a:off x="457200" y="1325880"/>
-            <a:ext cx="8229600" cy="822960"/>
-          </a:xfrm>
-          <a:prstGeom prst="roundRect">
-            <a:avLst>
-              <a:gd name="adj" fmla="val 8889"/>
-            </a:avLst>
+          <p:cNvPr id="5" name="Text 2"/>
+          <p:cNvSpPr/>
+          <p:nvPr/>
+        </p:nvSpPr>
+        <p:spPr>
+          <a:xfrm>
+            <a:off x="548640" y="1325880"/>
+            <a:ext cx="8046720" cy="548640"/>
+          </a:xfrm>
+          <a:prstGeom prst="rect">
+            <a:avLst/>
+          </a:prstGeom>
+          <a:noFill/>
+          <a:ln/>
+        </p:spPr>
+        <p:txBody>
+          <a:bodyPr wrap="square" lIns="0" tIns="0" rIns="0" bIns="0" rtlCol="0" anchor="t">
+            <a:normAutofit/>
+          </a:bodyPr>
+          <a:lstStyle/>
+          <a:p>
+            <a:pPr indent="0" marL="0">
+              <a:buNone/>
+            </a:pPr>
+            <a:r>
+              <a:rPr lang="en-US" sz="1400" dirty="0">
+                <a:solidFill>
+                  <a:srgbClr val="1F2937"/>
+                </a:solidFill>
+                <a:latin typeface="Calibri" pitchFamily="34" charset="0"/>
+                <a:ea typeface="Calibri" pitchFamily="34" charset="-122"/>
+                <a:cs typeface="Calibri" pitchFamily="34" charset="-120"/>
+              </a:rPr>
+              <a:t>Local API, docker compose up → :8080 (vulnerable) / :8081 (fixed):</a:t>
+            </a:r>
+            <a:endParaRPr lang="en-US" sz="1400" dirty="0"/>
+          </a:p>
+        </p:txBody>
+      </p:sp>
+      <p:sp>
+        <p:nvSpPr>
+          <p:cNvPr id="6" name="Shape 3"/>
+          <p:cNvSpPr/>
+          <p:nvPr/>
+        </p:nvSpPr>
+        <p:spPr>
+          <a:xfrm>
+            <a:off x="502920" y="1965960"/>
+            <a:ext cx="384048" cy="384048"/>
+          </a:xfrm>
+          <a:prstGeom prst="ellipse">
+            <a:avLst/>
           </a:prstGeom>
           <a:solidFill>
-            <a:srgbClr val="E8EDF3"/>
+            <a:srgbClr val="E35205"/>
           </a:solidFill>
           <a:ln/>
         </p:spPr>
       </p:sp>
       <p:sp>
         <p:nvSpPr>
-          <p:cNvPr id="6" name="Text 3"/>
-          <p:cNvSpPr/>
-          <p:nvPr/>
-        </p:nvSpPr>
-        <p:spPr>
-          <a:xfrm>
-            <a:off x="731520" y="1325880"/>
-            <a:ext cx="7680960" cy="822960"/>
+          <p:cNvPr id="7" name="Text 4"/>
+          <p:cNvSpPr/>
+          <p:nvPr/>
+        </p:nvSpPr>
+        <p:spPr>
+          <a:xfrm>
+            <a:off x="502920" y="1965960"/>
+            <a:ext cx="384048" cy="384048"/>
+          </a:xfrm>
+          <a:prstGeom prst="rect">
+            <a:avLst/>
+          </a:prstGeom>
+          <a:noFill/>
+          <a:ln/>
+        </p:spPr>
+        <p:txBody>
+          <a:bodyPr wrap="square" lIns="0" tIns="0" rIns="0" bIns="0" rtlCol="0" anchor="ctr"/>
+          <a:lstStyle/>
+          <a:p>
+            <a:pPr algn="ctr" indent="0" marL="0">
+              <a:buNone/>
+            </a:pPr>
+            <a:r>
+              <a:rPr lang="en-US" sz="1500" b="1" dirty="0">
+                <a:solidFill>
+                  <a:srgbClr val="0E1726"/>
+                </a:solidFill>
+                <a:latin typeface="Arial" pitchFamily="34" charset="0"/>
+                <a:ea typeface="Arial" pitchFamily="34" charset="-122"/>
+                <a:cs typeface="Arial" pitchFamily="34" charset="-120"/>
+              </a:rPr>
+              <a:t>1</a:t>
+            </a:r>
+            <a:endParaRPr lang="en-US" sz="1500" dirty="0"/>
+          </a:p>
+        </p:txBody>
+      </p:sp>
+      <p:sp>
+        <p:nvSpPr>
+          <p:cNvPr id="8" name="Text 5"/>
+          <p:cNvSpPr/>
+          <p:nvPr/>
+        </p:nvSpPr>
+        <p:spPr>
+          <a:xfrm>
+            <a:off x="1051560" y="1965960"/>
+            <a:ext cx="7589520" cy="658368"/>
           </a:xfrm>
           <a:prstGeom prst="rect">
             <a:avLst/>
@@ -3453,30 +3220,50 @@
               <a:buNone/>
             </a:pPr>
             <a:r>
-              <a:rPr lang="en-US" sz="1400" i="1" dirty="0">
-                <a:solidFill>
-                  <a:srgbClr val="E35205"/>
+              <a:rPr lang="en-US" sz="1350" dirty="0">
+                <a:solidFill>
+                  <a:srgbClr val="1F2937"/>
                 </a:solidFill>
                 <a:latin typeface="Calibri" pitchFamily="34" charset="0"/>
                 <a:ea typeface="Calibri" pitchFamily="34" charset="-122"/>
                 <a:cs typeface="Calibri" pitchFamily="34" charset="-120"/>
               </a:rPr>
-              <a:t>Bonus (optional, ~20 min): crAPI — OWASP's own intentionally-vulnerable API, real GUID-based BOLA, capture-only, no fix step, no separate grade</a:t>
-            </a:r>
-            <a:endParaRPr lang="en-US" sz="1400" dirty="0"/>
-          </a:p>
-        </p:txBody>
-      </p:sp>
-      <p:sp>
-        <p:nvSpPr>
-          <p:cNvPr id="7" name="Text 4"/>
-          <p:cNvSpPr/>
-          <p:nvPr/>
-        </p:nvSpPr>
-        <p:spPr>
-          <a:xfrm>
-            <a:off x="457200" y="4800600"/>
-            <a:ext cx="6949440" cy="274320"/>
+              <a:t>BOLA: 401 → 403 → 200 — probe, get denied, then read another user's orders as yourself</a:t>
+            </a:r>
+            <a:endParaRPr lang="en-US" sz="1350" dirty="0"/>
+          </a:p>
+        </p:txBody>
+      </p:sp>
+      <p:sp>
+        <p:nvSpPr>
+          <p:cNvPr id="9" name="Shape 6"/>
+          <p:cNvSpPr/>
+          <p:nvPr/>
+        </p:nvSpPr>
+        <p:spPr>
+          <a:xfrm>
+            <a:off x="502920" y="2697480"/>
+            <a:ext cx="384048" cy="384048"/>
+          </a:xfrm>
+          <a:prstGeom prst="ellipse">
+            <a:avLst/>
+          </a:prstGeom>
+          <a:solidFill>
+            <a:srgbClr val="E35205"/>
+          </a:solidFill>
+          <a:ln/>
+        </p:spPr>
+      </p:sp>
+      <p:sp>
+        <p:nvSpPr>
+          <p:cNvPr id="10" name="Text 7"/>
+          <p:cNvSpPr/>
+          <p:nvPr/>
+        </p:nvSpPr>
+        <p:spPr>
+          <a:xfrm>
+            <a:off x="502920" y="2697480"/>
+            <a:ext cx="384048" cy="384048"/>
           </a:xfrm>
           <a:prstGeom prst="rect">
             <a:avLst/>
@@ -3486,20 +3273,300 @@
         </p:spPr>
         <p:txBody>
           <a:bodyPr wrap="square" lIns="0" tIns="0" rIns="0" bIns="0" rtlCol="0" anchor="ctr"/>
+          <a:lstStyle/>
+          <a:p>
+            <a:pPr algn="ctr" indent="0" marL="0">
+              <a:buNone/>
+            </a:pPr>
+            <a:r>
+              <a:rPr lang="en-US" sz="1500" b="1" dirty="0">
+                <a:solidFill>
+                  <a:srgbClr val="0E1726"/>
+                </a:solidFill>
+                <a:latin typeface="Arial" pitchFamily="34" charset="0"/>
+                <a:ea typeface="Arial" pitchFamily="34" charset="-122"/>
+                <a:cs typeface="Arial" pitchFamily="34" charset="-120"/>
+              </a:rPr>
+              <a:t>2</a:t>
+            </a:r>
+            <a:endParaRPr lang="en-US" sz="1500" dirty="0"/>
+          </a:p>
+        </p:txBody>
+      </p:sp>
+      <p:sp>
+        <p:nvSpPr>
+          <p:cNvPr id="11" name="Text 8"/>
+          <p:cNvSpPr/>
+          <p:nvPr/>
+        </p:nvSpPr>
+        <p:spPr>
+          <a:xfrm>
+            <a:off x="1051560" y="2697480"/>
+            <a:ext cx="7589520" cy="402336"/>
+          </a:xfrm>
+          <a:prstGeom prst="rect">
+            <a:avLst/>
+          </a:prstGeom>
+          <a:noFill/>
+          <a:ln/>
+        </p:spPr>
+        <p:txBody>
+          <a:bodyPr wrap="square" lIns="0" tIns="0" rIns="0" bIns="0" rtlCol="0" anchor="ctr">
+            <a:normAutofit/>
+          </a:bodyPr>
           <a:lstStyle/>
           <a:p>
             <a:pPr indent="0" marL="0">
               <a:buNone/>
             </a:pPr>
             <a:r>
-              <a:rPr lang="en-US" sz="900" dirty="0">
-                <a:solidFill>
-                  <a:srgbClr val="64748B"/>
+              <a:rPr lang="en-US" sz="1350" dirty="0">
+                <a:solidFill>
+                  <a:srgbClr val="1F2937"/>
                 </a:solidFill>
                 <a:latin typeface="Calibri" pitchFamily="34" charset="0"/>
                 <a:ea typeface="Calibri" pitchFamily="34" charset="-122"/>
                 <a:cs typeface="Calibri" pitchFamily="34" charset="-120"/>
               </a:rPr>
+              <a:t>Mass assignment: smuggle is_admin/balance into account creation</a:t>
+            </a:r>
+            <a:endParaRPr lang="en-US" sz="1350" dirty="0"/>
+          </a:p>
+        </p:txBody>
+      </p:sp>
+      <p:sp>
+        <p:nvSpPr>
+          <p:cNvPr id="12" name="Shape 9"/>
+          <p:cNvSpPr/>
+          <p:nvPr/>
+        </p:nvSpPr>
+        <p:spPr>
+          <a:xfrm>
+            <a:off x="502920" y="3172968"/>
+            <a:ext cx="384048" cy="384048"/>
+          </a:xfrm>
+          <a:prstGeom prst="ellipse">
+            <a:avLst/>
+          </a:prstGeom>
+          <a:solidFill>
+            <a:srgbClr val="E35205"/>
+          </a:solidFill>
+          <a:ln/>
+        </p:spPr>
+      </p:sp>
+      <p:sp>
+        <p:nvSpPr>
+          <p:cNvPr id="13" name="Text 10"/>
+          <p:cNvSpPr/>
+          <p:nvPr/>
+        </p:nvSpPr>
+        <p:spPr>
+          <a:xfrm>
+            <a:off x="502920" y="3172968"/>
+            <a:ext cx="384048" cy="384048"/>
+          </a:xfrm>
+          <a:prstGeom prst="rect">
+            <a:avLst/>
+          </a:prstGeom>
+          <a:noFill/>
+          <a:ln/>
+        </p:spPr>
+        <p:txBody>
+          <a:bodyPr wrap="square" lIns="0" tIns="0" rIns="0" bIns="0" rtlCol="0" anchor="ctr"/>
+          <a:lstStyle/>
+          <a:p>
+            <a:pPr algn="ctr" indent="0" marL="0">
+              <a:buNone/>
+            </a:pPr>
+            <a:r>
+              <a:rPr lang="en-US" sz="1500" b="1" dirty="0">
+                <a:solidFill>
+                  <a:srgbClr val="0E1726"/>
+                </a:solidFill>
+                <a:latin typeface="Arial" pitchFamily="34" charset="0"/>
+                <a:ea typeface="Arial" pitchFamily="34" charset="-122"/>
+                <a:cs typeface="Arial" pitchFamily="34" charset="-120"/>
+              </a:rPr>
+              <a:t>3</a:t>
+            </a:r>
+            <a:endParaRPr lang="en-US" sz="1500" dirty="0"/>
+          </a:p>
+        </p:txBody>
+      </p:sp>
+      <p:sp>
+        <p:nvSpPr>
+          <p:cNvPr id="14" name="Text 11"/>
+          <p:cNvSpPr/>
+          <p:nvPr/>
+        </p:nvSpPr>
+        <p:spPr>
+          <a:xfrm>
+            <a:off x="1051560" y="3172968"/>
+            <a:ext cx="7589520" cy="402336"/>
+          </a:xfrm>
+          <a:prstGeom prst="rect">
+            <a:avLst/>
+          </a:prstGeom>
+          <a:noFill/>
+          <a:ln/>
+        </p:spPr>
+        <p:txBody>
+          <a:bodyPr wrap="square" lIns="0" tIns="0" rIns="0" bIns="0" rtlCol="0" anchor="ctr">
+            <a:normAutofit/>
+          </a:bodyPr>
+          <a:lstStyle/>
+          <a:p>
+            <a:pPr indent="0" marL="0">
+              <a:buNone/>
+            </a:pPr>
+            <a:r>
+              <a:rPr lang="en-US" sz="1350" dirty="0">
+                <a:solidFill>
+                  <a:srgbClr val="1F2937"/>
+                </a:solidFill>
+                <a:latin typeface="Calibri" pitchFamily="34" charset="0"/>
+                <a:ea typeface="Calibri" pitchFamily="34" charset="-122"/>
+                <a:cs typeface="Calibri" pitchFamily="34" charset="-120"/>
+              </a:rPr>
+              <a:t>Resource consumption: 401×5 → 429×2 on /api/login</a:t>
+            </a:r>
+            <a:endParaRPr lang="en-US" sz="1350" dirty="0"/>
+          </a:p>
+        </p:txBody>
+      </p:sp>
+      <p:sp>
+        <p:nvSpPr>
+          <p:cNvPr id="15" name="Shape 12"/>
+          <p:cNvSpPr/>
+          <p:nvPr/>
+        </p:nvSpPr>
+        <p:spPr>
+          <a:xfrm>
+            <a:off x="502920" y="3648456"/>
+            <a:ext cx="384048" cy="384048"/>
+          </a:xfrm>
+          <a:prstGeom prst="ellipse">
+            <a:avLst/>
+          </a:prstGeom>
+          <a:solidFill>
+            <a:srgbClr val="E35205"/>
+          </a:solidFill>
+          <a:ln/>
+        </p:spPr>
+      </p:sp>
+      <p:sp>
+        <p:nvSpPr>
+          <p:cNvPr id="16" name="Text 13"/>
+          <p:cNvSpPr/>
+          <p:nvPr/>
+        </p:nvSpPr>
+        <p:spPr>
+          <a:xfrm>
+            <a:off x="502920" y="3648456"/>
+            <a:ext cx="384048" cy="384048"/>
+          </a:xfrm>
+          <a:prstGeom prst="rect">
+            <a:avLst/>
+          </a:prstGeom>
+          <a:noFill/>
+          <a:ln/>
+        </p:spPr>
+        <p:txBody>
+          <a:bodyPr wrap="square" lIns="0" tIns="0" rIns="0" bIns="0" rtlCol="0" anchor="ctr"/>
+          <a:lstStyle/>
+          <a:p>
+            <a:pPr algn="ctr" indent="0" marL="0">
+              <a:buNone/>
+            </a:pPr>
+            <a:r>
+              <a:rPr lang="en-US" sz="1500" b="1" dirty="0">
+                <a:solidFill>
+                  <a:srgbClr val="0E1726"/>
+                </a:solidFill>
+                <a:latin typeface="Arial" pitchFamily="34" charset="0"/>
+                <a:ea typeface="Arial" pitchFamily="34" charset="-122"/>
+                <a:cs typeface="Arial" pitchFamily="34" charset="-120"/>
+              </a:rPr>
+              <a:t>4</a:t>
+            </a:r>
+            <a:endParaRPr lang="en-US" sz="1500" dirty="0"/>
+          </a:p>
+        </p:txBody>
+      </p:sp>
+      <p:sp>
+        <p:nvSpPr>
+          <p:cNvPr id="17" name="Text 14"/>
+          <p:cNvSpPr/>
+          <p:nvPr/>
+        </p:nvSpPr>
+        <p:spPr>
+          <a:xfrm>
+            <a:off x="1051560" y="3648456"/>
+            <a:ext cx="7589520" cy="402336"/>
+          </a:xfrm>
+          <a:prstGeom prst="rect">
+            <a:avLst/>
+          </a:prstGeom>
+          <a:noFill/>
+          <a:ln/>
+        </p:spPr>
+        <p:txBody>
+          <a:bodyPr wrap="square" lIns="0" tIns="0" rIns="0" bIns="0" rtlCol="0" anchor="ctr">
+            <a:normAutofit/>
+          </a:bodyPr>
+          <a:lstStyle/>
+          <a:p>
+            <a:pPr indent="0" marL="0">
+              <a:buNone/>
+            </a:pPr>
+            <a:r>
+              <a:rPr lang="en-US" sz="1350" dirty="0">
+                <a:solidFill>
+                  <a:srgbClr val="1F2937"/>
+                </a:solidFill>
+                <a:latin typeface="Calibri" pitchFamily="34" charset="0"/>
+                <a:ea typeface="Calibri" pitchFamily="34" charset="-122"/>
+                <a:cs typeface="Calibri" pitchFamily="34" charset="-120"/>
+              </a:rPr>
+              <a:t>Defend: switch to the pre-written solution_api.py, cite the exact fix line for each</a:t>
+            </a:r>
+            <a:endParaRPr lang="en-US" sz="1350" dirty="0"/>
+          </a:p>
+        </p:txBody>
+      </p:sp>
+      <p:sp>
+        <p:nvSpPr>
+          <p:cNvPr id="18" name="Text 15"/>
+          <p:cNvSpPr/>
+          <p:nvPr/>
+        </p:nvSpPr>
+        <p:spPr>
+          <a:xfrm>
+            <a:off x="457200" y="4800600"/>
+            <a:ext cx="6949440" cy="274320"/>
+          </a:xfrm>
+          <a:prstGeom prst="rect">
+            <a:avLst/>
+          </a:prstGeom>
+          <a:noFill/>
+          <a:ln/>
+        </p:spPr>
+        <p:txBody>
+          <a:bodyPr wrap="square" lIns="0" tIns="0" rIns="0" bIns="0" rtlCol="0" anchor="ctr"/>
+          <a:lstStyle/>
+          <a:p>
+            <a:pPr indent="0" marL="0">
+              <a:buNone/>
+            </a:pPr>
+            <a:r>
+              <a:rPr lang="en-US" sz="900" dirty="0">
+                <a:solidFill>
+                  <a:srgbClr val="64748B"/>
+                </a:solidFill>
+                <a:latin typeface="Calibri" pitchFamily="34" charset="0"/>
+                <a:ea typeface="Calibri" pitchFamily="34" charset="-122"/>
+                <a:cs typeface="Calibri" pitchFamily="34" charset="-120"/>
+              </a:rPr>
               <a:t>Software Security · Week 10</a:t>
             </a:r>
             <a:endParaRPr lang="en-US" sz="900" dirty="0"/>
@@ -3508,7 +3575,7 @@
       </p:sp>
       <p:pic>
         <p:nvPicPr>
-          <p:cNvPr id="8" name="Image 1" descr="/Users/pop7/Library/CloudStorage/OneDrive-MonsterConnectCo.,Ltd/Lecture/KOSEN69 - software-security/slides/pptx/assets/logo-small.png">    </p:cNvPr>
+          <p:cNvPr id="19" name="Image 1" descr="/Users/pop7/Library/CloudStorage/OneDrive-MonsterConnectCo.,Ltd/Lecture/KOSEN69 - software-security/slides/pptx/assets/logo-small.png">    </p:cNvPr>
           <p:cNvPicPr>
             <a:picLocks noChangeAspect="1"/>
           </p:cNvPicPr>
@@ -3646,7 +3713,7 @@
                 <a:ea typeface="Arial" pitchFamily="34" charset="-122"/>
                 <a:cs typeface="Arial" pitchFamily="34" charset="-120"/>
               </a:rPr>
-              <a:t>Deliverable</a:t>
+              <a:t>🥷 Today's raid — the graded target (cont.)</a:t>
             </a:r>
             <a:endParaRPr lang="en-US" sz="2600" dirty="0"/>
           </a:p>
@@ -3709,7 +3776,7 @@
                 <a:ea typeface="Calibri" pitchFamily="34" charset="-122"/>
                 <a:cs typeface="Calibri" pitchFamily="34" charset="-120"/>
               </a:rPr>
-              <a:t>📋 Worksheet 10 — labs/week10-api-security/worksheet.md (Part 3) · kickoff: docker compose up → :8080 (insecure) / :8081 (secure)</a:t>
+              <a:t>Bonus (optional, ~20 min): crAPI — OWASP's own intentionally-vulnerable API, real GUID-based BOLA, capture-only, no fix step, no separate grade</a:t>
             </a:r>
             <a:endParaRPr lang="en-US" sz="1400" dirty="0"/>
           </a:p>
@@ -3717,43 +3784,14 @@
       </p:sp>
       <p:sp>
         <p:nvSpPr>
-          <p:cNvPr id="7" name="Shape 4"/>
-          <p:cNvSpPr/>
-          <p:nvPr/>
-        </p:nvSpPr>
-        <p:spPr>
-          <a:xfrm>
-            <a:off x="457200" y="2313432"/>
-            <a:ext cx="8229600" cy="1719072"/>
-          </a:xfrm>
-          <a:prstGeom prst="roundRect">
-            <a:avLst>
-              <a:gd name="adj" fmla="val 4255"/>
-            </a:avLst>
-          </a:prstGeom>
-          <a:solidFill>
-            <a:srgbClr val="F1F5F9"/>
-          </a:solidFill>
-          <a:ln/>
-          <a:effectLst>
-            <a:outerShdw sx="100000" sy="100000" kx="0" ky="0" algn="bl" rotWithShape="0" blurRad="76200" dist="25400" dir="5400000">
-              <a:srgbClr val="000000">
-                <a:alpha val="12000"/>
-              </a:srgbClr>
-            </a:outerShdw>
-          </a:effectLst>
-        </p:spPr>
-      </p:sp>
-      <p:sp>
-        <p:nvSpPr>
-          <p:cNvPr id="8" name="Text 5"/>
-          <p:cNvSpPr/>
-          <p:nvPr/>
-        </p:nvSpPr>
-        <p:spPr>
-          <a:xfrm>
-            <a:off x="731520" y="2423160"/>
-            <a:ext cx="7680960" cy="1499616"/>
+          <p:cNvPr id="7" name="Text 4"/>
+          <p:cNvSpPr/>
+          <p:nvPr/>
+        </p:nvSpPr>
+        <p:spPr>
+          <a:xfrm>
+            <a:off x="457200" y="4800600"/>
+            <a:ext cx="6949440" cy="274320"/>
           </a:xfrm>
           <a:prstGeom prst="rect">
             <a:avLst/>
@@ -3762,129 +3800,21 @@
           <a:ln/>
         </p:spPr>
         <p:txBody>
-          <a:bodyPr wrap="square" lIns="0" tIns="0" rIns="0" bIns="0" rtlCol="0" anchor="t">
-            <a:normAutofit/>
-          </a:bodyPr>
-          <a:lstStyle/>
-          <a:p>
-            <a:pPr marL="342900" indent="-342900">
-              <a:spcAft>
-                <a:spcPts val="600"/>
-              </a:spcAft>
-              <a:buSzPct val="100000"/>
-              <a:buChar char="•"/>
-            </a:pPr>
-            <a:r>
-              <a:rPr lang="en-US" sz="1400" dirty="0">
-                <a:solidFill>
-                  <a:srgbClr val="1F2937"/>
+          <a:bodyPr wrap="square" lIns="0" tIns="0" rIns="0" bIns="0" rtlCol="0" anchor="ctr"/>
+          <a:lstStyle/>
+          <a:p>
+            <a:pPr indent="0" marL="0">
+              <a:buNone/>
+            </a:pPr>
+            <a:r>
+              <a:rPr lang="en-US" sz="900" dirty="0">
+                <a:solidFill>
+                  <a:srgbClr val="64748B"/>
                 </a:solidFill>
                 <a:latin typeface="Calibri" pitchFamily="34" charset="0"/>
                 <a:ea typeface="Calibri" pitchFamily="34" charset="-122"/>
                 <a:cs typeface="Calibri" pitchFamily="34" charset="-120"/>
               </a:rPr>
-              <a:t>Findings mapped to the API Top 10:2023 + your two personal flags (FLAG_BOLA, FLAG_MASSASSIGN)</a:t>
-            </a:r>
-            <a:endParaRPr lang="en-US" sz="1400" dirty="0"/>
-          </a:p>
-          <a:p>
-            <a:pPr marL="342900" indent="-342900">
-              <a:spcAft>
-                <a:spcPts val="600"/>
-              </a:spcAft>
-              <a:buSzPct val="100000"/>
-              <a:buChar char="•"/>
-            </a:pPr>
-            <a:r>
-              <a:rPr lang="en-US" sz="1400" dirty="0">
-                <a:solidFill>
-                  <a:srgbClr val="1F2937"/>
-                </a:solidFill>
-                <a:latin typeface="Calibri" pitchFamily="34" charset="0"/>
-                <a:ea typeface="Calibri" pitchFamily="34" charset="-122"/>
-                <a:cs typeface="Calibri" pitchFamily="34" charset="-120"/>
-              </a:rPr>
-              <a:t>Fixes (authz checks, schemas, limits) — cited from solution_api.py</a:t>
-            </a:r>
-            <a:endParaRPr lang="en-US" sz="1400" dirty="0"/>
-          </a:p>
-          <a:p>
-            <a:pPr marL="342900" indent="-342900">
-              <a:spcAft>
-                <a:spcPts val="600"/>
-              </a:spcAft>
-              <a:buSzPct val="100000"/>
-              <a:buChar char="•"/>
-            </a:pPr>
-            <a:r>
-              <a:rPr lang="en-US" sz="1400" dirty="0">
-                <a:solidFill>
-                  <a:srgbClr val="1F2937"/>
-                </a:solidFill>
-                <a:latin typeface="Calibri" pitchFamily="34" charset="0"/>
-                <a:ea typeface="Calibri" pitchFamily="34" charset="-122"/>
-                <a:cs typeface="Calibri" pitchFamily="34" charset="-120"/>
-              </a:rPr>
-              <a:t>Proof exploits now fail</a:t>
-            </a:r>
-            <a:endParaRPr lang="en-US" sz="1400" dirty="0"/>
-          </a:p>
-          <a:p>
-            <a:pPr marL="342900" indent="-342900">
-              <a:spcAft>
-                <a:spcPts val="600"/>
-              </a:spcAft>
-              <a:buSzPct val="100000"/>
-              <a:buChar char="•"/>
-            </a:pPr>
-            <a:r>
-              <a:rPr lang="en-US" sz="1400" dirty="0">
-                <a:solidFill>
-                  <a:srgbClr val="1F2937"/>
-                </a:solidFill>
-                <a:latin typeface="Calibri" pitchFamily="34" charset="0"/>
-                <a:ea typeface="Calibri" pitchFamily="34" charset="-122"/>
-                <a:cs typeface="Calibri" pitchFamily="34" charset="-120"/>
-              </a:rPr>
-              <a:t>+ Audit the AI / EiPE / Prompt Problem (see worksheet)</a:t>
-            </a:r>
-            <a:endParaRPr lang="en-US" sz="1400" dirty="0"/>
-          </a:p>
-        </p:txBody>
-      </p:sp>
-      <p:sp>
-        <p:nvSpPr>
-          <p:cNvPr id="9" name="Text 6"/>
-          <p:cNvSpPr/>
-          <p:nvPr/>
-        </p:nvSpPr>
-        <p:spPr>
-          <a:xfrm>
-            <a:off x="457200" y="4800600"/>
-            <a:ext cx="6949440" cy="274320"/>
-          </a:xfrm>
-          <a:prstGeom prst="rect">
-            <a:avLst/>
-          </a:prstGeom>
-          <a:noFill/>
-          <a:ln/>
-        </p:spPr>
-        <p:txBody>
-          <a:bodyPr wrap="square" lIns="0" tIns="0" rIns="0" bIns="0" rtlCol="0" anchor="ctr"/>
-          <a:lstStyle/>
-          <a:p>
-            <a:pPr indent="0" marL="0">
-              <a:buNone/>
-            </a:pPr>
-            <a:r>
-              <a:rPr lang="en-US" sz="900" dirty="0">
-                <a:solidFill>
-                  <a:srgbClr val="64748B"/>
-                </a:solidFill>
-                <a:latin typeface="Calibri" pitchFamily="34" charset="0"/>
-                <a:ea typeface="Calibri" pitchFamily="34" charset="-122"/>
-                <a:cs typeface="Calibri" pitchFamily="34" charset="-120"/>
-              </a:rPr>
               <a:t>Software Security · Week 10</a:t>
             </a:r>
             <a:endParaRPr lang="en-US" sz="900" dirty="0"/>
@@ -3893,7 +3823,7 @@
       </p:sp>
       <p:pic>
         <p:nvPicPr>
-          <p:cNvPr id="10" name="Image 1" descr="/Users/pop7/Library/CloudStorage/OneDrive-MonsterConnectCo.,Ltd/Lecture/KOSEN69 - software-security/slides/pptx/assets/logo-small.png">    </p:cNvPr>
+          <p:cNvPr id="8" name="Image 1" descr="/Users/pop7/Library/CloudStorage/OneDrive-MonsterConnectCo.,Ltd/Lecture/KOSEN69 - software-security/slides/pptx/assets/logo-small.png">    </p:cNvPr>
           <p:cNvPicPr>
             <a:picLocks noChangeAspect="1"/>
           </p:cNvPicPr>
@@ -4031,7 +3961,7 @@
                 <a:ea typeface="Arial" pitchFamily="34" charset="-122"/>
                 <a:cs typeface="Arial" pitchFamily="34" charset="-120"/>
               </a:rPr>
-              <a:t>Key takeaways</a:t>
+              <a:t>Deliverable</a:t>
             </a:r>
             <a:endParaRPr lang="en-US" sz="2600" dirty="0"/>
           </a:p>
@@ -4046,11 +3976,74 @@
         <p:spPr>
           <a:xfrm>
             <a:off x="457200" y="1325880"/>
-            <a:ext cx="8229600" cy="1207008"/>
+            <a:ext cx="8229600" cy="822960"/>
           </a:xfrm>
           <a:prstGeom prst="roundRect">
             <a:avLst>
-              <a:gd name="adj" fmla="val 6061"/>
+              <a:gd name="adj" fmla="val 8889"/>
+            </a:avLst>
+          </a:prstGeom>
+          <a:solidFill>
+            <a:srgbClr val="E8EDF3"/>
+          </a:solidFill>
+          <a:ln/>
+        </p:spPr>
+      </p:sp>
+      <p:sp>
+        <p:nvSpPr>
+          <p:cNvPr id="6" name="Text 3"/>
+          <p:cNvSpPr/>
+          <p:nvPr/>
+        </p:nvSpPr>
+        <p:spPr>
+          <a:xfrm>
+            <a:off x="731520" y="1325880"/>
+            <a:ext cx="7680960" cy="822960"/>
+          </a:xfrm>
+          <a:prstGeom prst="rect">
+            <a:avLst/>
+          </a:prstGeom>
+          <a:noFill/>
+          <a:ln/>
+        </p:spPr>
+        <p:txBody>
+          <a:bodyPr wrap="square" lIns="0" tIns="0" rIns="0" bIns="0" rtlCol="0" anchor="ctr">
+            <a:normAutofit/>
+          </a:bodyPr>
+          <a:lstStyle/>
+          <a:p>
+            <a:pPr indent="0" marL="0">
+              <a:buNone/>
+            </a:pPr>
+            <a:r>
+              <a:rPr lang="en-US" sz="1400" i="1" dirty="0">
+                <a:solidFill>
+                  <a:srgbClr val="E35205"/>
+                </a:solidFill>
+                <a:latin typeface="Calibri" pitchFamily="34" charset="0"/>
+                <a:ea typeface="Calibri" pitchFamily="34" charset="-122"/>
+                <a:cs typeface="Calibri" pitchFamily="34" charset="-120"/>
+              </a:rPr>
+              <a:t>📋 Worksheet 10 — labs/week10-api-security/worksheet.md (Part 3) · kickoff: docker compose up → :8080 (insecure) / :8081 (secure)</a:t>
+            </a:r>
+            <a:endParaRPr lang="en-US" sz="1400" dirty="0"/>
+          </a:p>
+        </p:txBody>
+      </p:sp>
+      <p:sp>
+        <p:nvSpPr>
+          <p:cNvPr id="7" name="Shape 4"/>
+          <p:cNvSpPr/>
+          <p:nvPr/>
+        </p:nvSpPr>
+        <p:spPr>
+          <a:xfrm>
+            <a:off x="457200" y="2313432"/>
+            <a:ext cx="8229600" cy="1719072"/>
+          </a:xfrm>
+          <a:prstGeom prst="roundRect">
+            <a:avLst>
+              <a:gd name="adj" fmla="val 4255"/>
             </a:avLst>
           </a:prstGeom>
           <a:solidFill>
@@ -4068,14 +4061,14 @@
       </p:sp>
       <p:sp>
         <p:nvSpPr>
-          <p:cNvPr id="6" name="Text 3"/>
-          <p:cNvSpPr/>
-          <p:nvPr/>
-        </p:nvSpPr>
-        <p:spPr>
-          <a:xfrm>
-            <a:off x="731520" y="1435608"/>
-            <a:ext cx="7680960" cy="987552"/>
+          <p:cNvPr id="8" name="Text 5"/>
+          <p:cNvSpPr/>
+          <p:nvPr/>
+        </p:nvSpPr>
+        <p:spPr>
+          <a:xfrm>
+            <a:off x="731520" y="2423160"/>
+            <a:ext cx="7680960" cy="1499616"/>
           </a:xfrm>
           <a:prstGeom prst="rect">
             <a:avLst/>
@@ -4105,7 +4098,7 @@
                 <a:ea typeface="Calibri" pitchFamily="34" charset="-122"/>
                 <a:cs typeface="Calibri" pitchFamily="34" charset="-120"/>
               </a:rPr>
-              <a:t>BOLA/IDOR is the dominant API bug — check ownership</a:t>
+              <a:t>Findings mapped to the API Top 10:2023 + your two personal flags (FLAG_BOLA, FLAG_MASSASSIGN)</a:t>
             </a:r>
             <a:endParaRPr lang="en-US" sz="1400" dirty="0"/>
           </a:p>
@@ -4126,7 +4119,7 @@
                 <a:ea typeface="Calibri" pitchFamily="34" charset="-122"/>
                 <a:cs typeface="Calibri" pitchFamily="34" charset="-120"/>
               </a:rPr>
-              <a:t>Bind only fields you intend</a:t>
+              <a:t>Fixes (authz checks, schemas, limits) — cited from solution_api.py</a:t>
             </a:r>
             <a:endParaRPr lang="en-US" sz="1400" dirty="0"/>
           </a:p>
@@ -4147,45 +4140,66 @@
                 <a:ea typeface="Calibri" pitchFamily="34" charset="-122"/>
                 <a:cs typeface="Calibri" pitchFamily="34" charset="-120"/>
               </a:rPr>
-              <a:t>Validate and throttle everything</a:t>
+              <a:t>Proof exploits now fail</a:t>
             </a:r>
             <a:endParaRPr lang="en-US" sz="1400" dirty="0"/>
           </a:p>
-        </p:txBody>
-      </p:sp>
-      <p:sp>
-        <p:nvSpPr>
-          <p:cNvPr id="7" name="Text 4"/>
-          <p:cNvSpPr/>
-          <p:nvPr/>
-        </p:nvSpPr>
-        <p:spPr>
-          <a:xfrm>
-            <a:off x="457200" y="4800600"/>
-            <a:ext cx="6949440" cy="274320"/>
-          </a:xfrm>
-          <a:prstGeom prst="rect">
-            <a:avLst/>
-          </a:prstGeom>
-          <a:noFill/>
-          <a:ln/>
-        </p:spPr>
-        <p:txBody>
-          <a:bodyPr wrap="square" lIns="0" tIns="0" rIns="0" bIns="0" rtlCol="0" anchor="ctr"/>
-          <a:lstStyle/>
-          <a:p>
-            <a:pPr indent="0" marL="0">
-              <a:buNone/>
-            </a:pPr>
-            <a:r>
-              <a:rPr lang="en-US" sz="900" dirty="0">
-                <a:solidFill>
-                  <a:srgbClr val="64748B"/>
+          <a:p>
+            <a:pPr marL="342900" indent="-342900">
+              <a:spcAft>
+                <a:spcPts val="600"/>
+              </a:spcAft>
+              <a:buSzPct val="100000"/>
+              <a:buChar char="•"/>
+            </a:pPr>
+            <a:r>
+              <a:rPr lang="en-US" sz="1400" dirty="0">
+                <a:solidFill>
+                  <a:srgbClr val="1F2937"/>
                 </a:solidFill>
                 <a:latin typeface="Calibri" pitchFamily="34" charset="0"/>
                 <a:ea typeface="Calibri" pitchFamily="34" charset="-122"/>
                 <a:cs typeface="Calibri" pitchFamily="34" charset="-120"/>
               </a:rPr>
+              <a:t>+ Audit the AI / EiPE / Prompt Problem (see worksheet)</a:t>
+            </a:r>
+            <a:endParaRPr lang="en-US" sz="1400" dirty="0"/>
+          </a:p>
+        </p:txBody>
+      </p:sp>
+      <p:sp>
+        <p:nvSpPr>
+          <p:cNvPr id="9" name="Text 6"/>
+          <p:cNvSpPr/>
+          <p:nvPr/>
+        </p:nvSpPr>
+        <p:spPr>
+          <a:xfrm>
+            <a:off x="457200" y="4800600"/>
+            <a:ext cx="6949440" cy="274320"/>
+          </a:xfrm>
+          <a:prstGeom prst="rect">
+            <a:avLst/>
+          </a:prstGeom>
+          <a:noFill/>
+          <a:ln/>
+        </p:spPr>
+        <p:txBody>
+          <a:bodyPr wrap="square" lIns="0" tIns="0" rIns="0" bIns="0" rtlCol="0" anchor="ctr"/>
+          <a:lstStyle/>
+          <a:p>
+            <a:pPr indent="0" marL="0">
+              <a:buNone/>
+            </a:pPr>
+            <a:r>
+              <a:rPr lang="en-US" sz="900" dirty="0">
+                <a:solidFill>
+                  <a:srgbClr val="64748B"/>
+                </a:solidFill>
+                <a:latin typeface="Calibri" pitchFamily="34" charset="0"/>
+                <a:ea typeface="Calibri" pitchFamily="34" charset="-122"/>
+                <a:cs typeface="Calibri" pitchFamily="34" charset="-120"/>
+              </a:rPr>
               <a:t>Software Security · Week 10</a:t>
             </a:r>
             <a:endParaRPr lang="en-US" sz="900" dirty="0"/>
@@ -4194,7 +4208,7 @@
       </p:sp>
       <p:pic>
         <p:nvPicPr>
-          <p:cNvPr id="8" name="Image 1" descr="/Users/pop7/Library/CloudStorage/OneDrive-MonsterConnectCo.,Ltd/Lecture/KOSEN69 - software-security/slides/pptx/assets/logo-small.png">    </p:cNvPr>
+          <p:cNvPr id="10" name="Image 1" descr="/Users/pop7/Library/CloudStorage/OneDrive-MonsterConnectCo.,Ltd/Lecture/KOSEN69 - software-security/slides/pptx/assets/logo-small.png">    </p:cNvPr>
           <p:cNvPicPr>
             <a:picLocks noChangeAspect="1"/>
           </p:cNvPicPr>
@@ -4250,6 +4264,307 @@
       </p:grpSpPr>
       <p:sp>
         <p:nvSpPr>
+          <p:cNvPr id="2" name="Shape 0"/>
+          <p:cNvSpPr/>
+          <p:nvPr/>
+        </p:nvSpPr>
+        <p:spPr>
+          <a:xfrm>
+            <a:off x="457200" y="384048"/>
+            <a:ext cx="530352" cy="530352"/>
+          </a:xfrm>
+          <a:prstGeom prst="ellipse">
+            <a:avLst/>
+          </a:prstGeom>
+          <a:solidFill>
+            <a:srgbClr val="E35205"/>
+          </a:solidFill>
+          <a:ln/>
+          <a:effectLst>
+            <a:outerShdw sx="100000" sy="100000" kx="0" ky="0" algn="bl" rotWithShape="0" blurRad="76200" dist="25400" dir="5400000">
+              <a:srgbClr val="000000">
+                <a:alpha val="12000"/>
+              </a:srgbClr>
+            </a:outerShdw>
+          </a:effectLst>
+        </p:spPr>
+      </p:sp>
+      <p:pic>
+        <p:nvPicPr>
+          <p:cNvPr id="3" name="Image 0" descr="preencoded.png">    </p:cNvPr>
+          <p:cNvPicPr>
+            <a:picLocks noChangeAspect="1"/>
+          </p:cNvPicPr>
+          <p:nvPr/>
+        </p:nvPicPr>
+        <p:blipFill>
+          <a:blip r:embed="rId1"/>
+          <a:stretch>
+            <a:fillRect/>
+          </a:stretch>
+        </p:blipFill>
+        <p:spPr>
+          <a:xfrm>
+            <a:off x="594360" y="521208"/>
+            <a:ext cx="256032" cy="256032"/>
+          </a:xfrm>
+          <a:prstGeom prst="rect">
+            <a:avLst/>
+          </a:prstGeom>
+        </p:spPr>
+      </p:pic>
+      <p:sp>
+        <p:nvSpPr>
+          <p:cNvPr id="4" name="Text 1"/>
+          <p:cNvSpPr/>
+          <p:nvPr/>
+        </p:nvSpPr>
+        <p:spPr>
+          <a:xfrm>
+            <a:off x="1143000" y="329184"/>
+            <a:ext cx="7498080" cy="603504"/>
+          </a:xfrm>
+          <a:prstGeom prst="rect">
+            <a:avLst/>
+          </a:prstGeom>
+          <a:noFill/>
+          <a:ln/>
+        </p:spPr>
+        <p:txBody>
+          <a:bodyPr wrap="square" lIns="0" tIns="0" rIns="0" bIns="0" rtlCol="0" anchor="ctr"/>
+          <a:lstStyle/>
+          <a:p>
+            <a:pPr indent="0" marL="0">
+              <a:buNone/>
+            </a:pPr>
+            <a:r>
+              <a:rPr lang="en-US" sz="2600" b="1" dirty="0">
+                <a:solidFill>
+                  <a:srgbClr val="1F2937"/>
+                </a:solidFill>
+                <a:latin typeface="Arial" pitchFamily="34" charset="0"/>
+                <a:ea typeface="Arial" pitchFamily="34" charset="-122"/>
+                <a:cs typeface="Arial" pitchFamily="34" charset="-120"/>
+              </a:rPr>
+              <a:t>Key takeaways</a:t>
+            </a:r>
+            <a:endParaRPr lang="en-US" sz="2600" dirty="0"/>
+          </a:p>
+        </p:txBody>
+      </p:sp>
+      <p:sp>
+        <p:nvSpPr>
+          <p:cNvPr id="5" name="Shape 2"/>
+          <p:cNvSpPr/>
+          <p:nvPr/>
+        </p:nvSpPr>
+        <p:spPr>
+          <a:xfrm>
+            <a:off x="457200" y="1325880"/>
+            <a:ext cx="8229600" cy="1207008"/>
+          </a:xfrm>
+          <a:prstGeom prst="roundRect">
+            <a:avLst>
+              <a:gd name="adj" fmla="val 6061"/>
+            </a:avLst>
+          </a:prstGeom>
+          <a:solidFill>
+            <a:srgbClr val="F1F5F9"/>
+          </a:solidFill>
+          <a:ln/>
+          <a:effectLst>
+            <a:outerShdw sx="100000" sy="100000" kx="0" ky="0" algn="bl" rotWithShape="0" blurRad="76200" dist="25400" dir="5400000">
+              <a:srgbClr val="000000">
+                <a:alpha val="12000"/>
+              </a:srgbClr>
+            </a:outerShdw>
+          </a:effectLst>
+        </p:spPr>
+      </p:sp>
+      <p:sp>
+        <p:nvSpPr>
+          <p:cNvPr id="6" name="Text 3"/>
+          <p:cNvSpPr/>
+          <p:nvPr/>
+        </p:nvSpPr>
+        <p:spPr>
+          <a:xfrm>
+            <a:off x="731520" y="1435608"/>
+            <a:ext cx="7680960" cy="987552"/>
+          </a:xfrm>
+          <a:prstGeom prst="rect">
+            <a:avLst/>
+          </a:prstGeom>
+          <a:noFill/>
+          <a:ln/>
+        </p:spPr>
+        <p:txBody>
+          <a:bodyPr wrap="square" lIns="0" tIns="0" rIns="0" bIns="0" rtlCol="0" anchor="t">
+            <a:normAutofit/>
+          </a:bodyPr>
+          <a:lstStyle/>
+          <a:p>
+            <a:pPr marL="342900" indent="-342900">
+              <a:spcAft>
+                <a:spcPts val="600"/>
+              </a:spcAft>
+              <a:buSzPct val="100000"/>
+              <a:buChar char="•"/>
+            </a:pPr>
+            <a:r>
+              <a:rPr lang="en-US" sz="1400" dirty="0">
+                <a:solidFill>
+                  <a:srgbClr val="1F2937"/>
+                </a:solidFill>
+                <a:latin typeface="Calibri" pitchFamily="34" charset="0"/>
+                <a:ea typeface="Calibri" pitchFamily="34" charset="-122"/>
+                <a:cs typeface="Calibri" pitchFamily="34" charset="-120"/>
+              </a:rPr>
+              <a:t>BOLA/IDOR is the dominant API bug — check ownership</a:t>
+            </a:r>
+            <a:endParaRPr lang="en-US" sz="1400" dirty="0"/>
+          </a:p>
+          <a:p>
+            <a:pPr marL="342900" indent="-342900">
+              <a:spcAft>
+                <a:spcPts val="600"/>
+              </a:spcAft>
+              <a:buSzPct val="100000"/>
+              <a:buChar char="•"/>
+            </a:pPr>
+            <a:r>
+              <a:rPr lang="en-US" sz="1400" dirty="0">
+                <a:solidFill>
+                  <a:srgbClr val="1F2937"/>
+                </a:solidFill>
+                <a:latin typeface="Calibri" pitchFamily="34" charset="0"/>
+                <a:ea typeface="Calibri" pitchFamily="34" charset="-122"/>
+                <a:cs typeface="Calibri" pitchFamily="34" charset="-120"/>
+              </a:rPr>
+              <a:t>Bind only fields you intend</a:t>
+            </a:r>
+            <a:endParaRPr lang="en-US" sz="1400" dirty="0"/>
+          </a:p>
+          <a:p>
+            <a:pPr marL="342900" indent="-342900">
+              <a:spcAft>
+                <a:spcPts val="600"/>
+              </a:spcAft>
+              <a:buSzPct val="100000"/>
+              <a:buChar char="•"/>
+            </a:pPr>
+            <a:r>
+              <a:rPr lang="en-US" sz="1400" dirty="0">
+                <a:solidFill>
+                  <a:srgbClr val="1F2937"/>
+                </a:solidFill>
+                <a:latin typeface="Calibri" pitchFamily="34" charset="0"/>
+                <a:ea typeface="Calibri" pitchFamily="34" charset="-122"/>
+                <a:cs typeface="Calibri" pitchFamily="34" charset="-120"/>
+              </a:rPr>
+              <a:t>Validate and throttle everything</a:t>
+            </a:r>
+            <a:endParaRPr lang="en-US" sz="1400" dirty="0"/>
+          </a:p>
+        </p:txBody>
+      </p:sp>
+      <p:sp>
+        <p:nvSpPr>
+          <p:cNvPr id="7" name="Text 4"/>
+          <p:cNvSpPr/>
+          <p:nvPr/>
+        </p:nvSpPr>
+        <p:spPr>
+          <a:xfrm>
+            <a:off x="457200" y="4800600"/>
+            <a:ext cx="6949440" cy="274320"/>
+          </a:xfrm>
+          <a:prstGeom prst="rect">
+            <a:avLst/>
+          </a:prstGeom>
+          <a:noFill/>
+          <a:ln/>
+        </p:spPr>
+        <p:txBody>
+          <a:bodyPr wrap="square" lIns="0" tIns="0" rIns="0" bIns="0" rtlCol="0" anchor="ctr"/>
+          <a:lstStyle/>
+          <a:p>
+            <a:pPr indent="0" marL="0">
+              <a:buNone/>
+            </a:pPr>
+            <a:r>
+              <a:rPr lang="en-US" sz="900" dirty="0">
+                <a:solidFill>
+                  <a:srgbClr val="64748B"/>
+                </a:solidFill>
+                <a:latin typeface="Calibri" pitchFamily="34" charset="0"/>
+                <a:ea typeface="Calibri" pitchFamily="34" charset="-122"/>
+                <a:cs typeface="Calibri" pitchFamily="34" charset="-120"/>
+              </a:rPr>
+              <a:t>Software Security · Week 10</a:t>
+            </a:r>
+            <a:endParaRPr lang="en-US" sz="900" dirty="0"/>
+          </a:p>
+        </p:txBody>
+      </p:sp>
+      <p:pic>
+        <p:nvPicPr>
+          <p:cNvPr id="8" name="Image 1" descr="/Users/pop7/Library/CloudStorage/OneDrive-MonsterConnectCo.,Ltd/Lecture/KOSEN69 - software-security/slides/pptx/assets/logo-small.png">    </p:cNvPr>
+          <p:cNvPicPr>
+            <a:picLocks noChangeAspect="1"/>
+          </p:cNvPicPr>
+          <p:nvPr/>
+        </p:nvPicPr>
+        <p:blipFill>
+          <a:blip r:embed="rId2"/>
+          <a:stretch>
+            <a:fillRect/>
+          </a:stretch>
+        </p:blipFill>
+        <p:spPr>
+          <a:xfrm>
+            <a:off x="7882128" y="4700016"/>
+            <a:ext cx="768096" cy="356616"/>
+          </a:xfrm>
+          <a:prstGeom prst="rect">
+            <a:avLst/>
+          </a:prstGeom>
+        </p:spPr>
+      </p:pic>
+    </p:spTree>
+  </p:cSld>
+  <p:clrMapOvr>
+    <a:masterClrMapping/>
+  </p:clrMapOvr>
+</p:sld>
+</file>
+
+<file path=ppt/slides/slide16.xml><?xml version="1.0" encoding="utf-8"?>
+<p:sld xmlns:a="http://schemas.openxmlformats.org/drawingml/2006/main" xmlns:r="http://schemas.openxmlformats.org/officeDocument/2006/relationships" xmlns:p="http://schemas.openxmlformats.org/presentationml/2006/main">
+  <p:cSld name="Slide 16">
+    <p:bg>
+      <p:bgPr>
+        <a:solidFill>
+          <a:srgbClr val="FFFFFF"/>
+        </a:solidFill>
+      </p:bgPr>
+    </p:bg>
+    <p:spTree>
+      <p:nvGrpSpPr>
+        <p:cNvPr id="1" name=""/>
+        <p:cNvGrpSpPr/>
+        <p:nvPr/>
+      </p:nvGrpSpPr>
+      <p:grpSpPr>
+        <a:xfrm>
+          <a:off x="0" y="0"/>
+          <a:ext cx="0" cy="0"/>
+          <a:chOff x="0" y="0"/>
+          <a:chExt cx="0" cy="0"/>
+        </a:xfrm>
+      </p:grpSpPr>
+      <p:sp>
+        <p:nvSpPr>
           <p:cNvPr id="2" name="Text 0"/>
           <p:cNvSpPr/>
           <p:nvPr/>
@@ -5936,8 +6251,8 @@
         </p:nvSpPr>
         <p:spPr>
           <a:xfrm>
-            <a:off x="457200" y="4800600"/>
-            <a:ext cx="6949440" cy="274320"/>
+            <a:off x="548640" y="3044952"/>
+            <a:ext cx="8046720" cy="548640"/>
           </a:xfrm>
           <a:prstGeom prst="rect">
             <a:avLst/>
@@ -5946,21 +6261,62 @@
           <a:ln/>
         </p:spPr>
         <p:txBody>
-          <a:bodyPr wrap="square" lIns="0" tIns="0" rIns="0" bIns="0" rtlCol="0" anchor="ctr"/>
+          <a:bodyPr wrap="square" lIns="0" tIns="0" rIns="0" bIns="0" rtlCol="0" anchor="t">
+            <a:normAutofit/>
+          </a:bodyPr>
           <a:lstStyle/>
           <a:p>
             <a:pPr indent="0" marL="0">
               <a:buNone/>
             </a:pPr>
             <a:r>
-              <a:rPr lang="en-US" sz="900" dirty="0">
-                <a:solidFill>
-                  <a:srgbClr val="64748B"/>
+              <a:rPr lang="en-US" sz="1400" dirty="0">
+                <a:solidFill>
+                  <a:srgbClr val="1F2937"/>
                 </a:solidFill>
                 <a:latin typeface="Calibri" pitchFamily="34" charset="0"/>
                 <a:ea typeface="Calibri" pitchFamily="34" charset="-122"/>
                 <a:cs typeface="Calibri" pitchFamily="34" charset="-120"/>
               </a:rPr>
+              <a:t>Try it live: /sim/mass-assign (interactive simulation, web only)</a:t>
+            </a:r>
+            <a:endParaRPr lang="en-US" sz="1400" dirty="0"/>
+          </a:p>
+        </p:txBody>
+      </p:sp>
+      <p:sp>
+        <p:nvSpPr>
+          <p:cNvPr id="10" name="Text 7"/>
+          <p:cNvSpPr/>
+          <p:nvPr/>
+        </p:nvSpPr>
+        <p:spPr>
+          <a:xfrm>
+            <a:off x="457200" y="4800600"/>
+            <a:ext cx="6949440" cy="274320"/>
+          </a:xfrm>
+          <a:prstGeom prst="rect">
+            <a:avLst/>
+          </a:prstGeom>
+          <a:noFill/>
+          <a:ln/>
+        </p:spPr>
+        <p:txBody>
+          <a:bodyPr wrap="square" lIns="0" tIns="0" rIns="0" bIns="0" rtlCol="0" anchor="ctr"/>
+          <a:lstStyle/>
+          <a:p>
+            <a:pPr indent="0" marL="0">
+              <a:buNone/>
+            </a:pPr>
+            <a:r>
+              <a:rPr lang="en-US" sz="900" dirty="0">
+                <a:solidFill>
+                  <a:srgbClr val="64748B"/>
+                </a:solidFill>
+                <a:latin typeface="Calibri" pitchFamily="34" charset="0"/>
+                <a:ea typeface="Calibri" pitchFamily="34" charset="-122"/>
+                <a:cs typeface="Calibri" pitchFamily="34" charset="-120"/>
+              </a:rPr>
               <a:t>Software Security · Week 10</a:t>
             </a:r>
             <a:endParaRPr lang="en-US" sz="900" dirty="0"/>
@@ -5969,7 +6325,7 @@
       </p:sp>
       <p:pic>
         <p:nvPicPr>
-          <p:cNvPr id="10" name="Image 1" descr="/Users/pop7/Library/CloudStorage/OneDrive-MonsterConnectCo.,Ltd/Lecture/KOSEN69 - software-security/slides/pptx/assets/logo-small.png">    </p:cNvPr>
+          <p:cNvPr id="11" name="Image 1" descr="/Users/pop7/Library/CloudStorage/OneDrive-MonsterConnectCo.,Ltd/Lecture/KOSEN69 - software-security/slides/pptx/assets/logo-small.png">    </p:cNvPr>
           <p:cNvPicPr>
             <a:picLocks noChangeAspect="1"/>
           </p:cNvPicPr>
